--- a/slaydlar/M14.pptx
+++ b/slaydlar/M14.pptx
@@ -20,6 +20,7 @@
     <p:sldId id="268" r:id="rId20"/>
     <p:sldId id="269" r:id="rId21"/>
     <p:sldId id="270" r:id="rId22"/>
+    <p:sldId id="271" r:id="rId23"/>
   </p:sldIdLst>
   <p:sldSz cx="12192000" cy="6858000" type="screen4x3"/>
   <p:notesSz cx="6858000" cy="9144000"/>
@@ -780,19 +781,31 @@
           <a:lstStyle/>
           <a:p>
             <a:r>
-              <a:t>Shaffoflik (transparency) va tushuntirilish (explainability) bir narsa emas. Shaffoflik — tizim haqida axborotning mavjudligi: u qanday ma'lumotda o'qitilgan, qaysi maqsadda, qanday cheklovlar bilan, foydalanuvchi SI bilan muloqot qilayotganini biladimi. Tushuntirilish — aniq bir qaror yoki model xatti-harakati uchun inson tushunadigan sabab berish qobiliyati. Talqin qilinuvchanlik (interpretability) esa modelning ichki mexanizmi bevosita tushunarli ekani (chiziqli model, kichik qaror daraxti).</a:t>
+              <a:t>Adolatlilikning yagona ta'rifi yo'q — va bu matematik fakt, texnik kamchilik emas. Ikkilik tasniflash uchun asosiy guruh metrikalari quyidagilar (bu yerda Y — haqiqiy yorliq, Ŷ — bashorat, A — himoyalangan belgi, masalan jins yoki yosh guruhi):</a:t>
             </a:r>
           </a:p>
           <a:p/>
           <a:p>
             <a:r>
-              <a:t>XAI usullari bir nechta o'q bo'yicha tasniflanadi: lokal (bitta bashorat uchun) va global (butun model uchun); model-agnostik va modelga xos; ichki (intrinsic, model o'zi talqin qilinuvchan) va post-hoc. Eng ko'p qo'llaniladigan ikkita post-hoc model-agnostik usul — LIME (Ribeiro va boshq., 2016), bashorat atrofida lokal chiziqli surrogat quradi, va SHAP (Lundberg va Lee, 2017), kooperativ o'yinlar nazariyasidagi Shapley qiymatlariga asoslanadi va har bir belgining bashoratga hissasini additiv tarzda taqsimlaydi: f(x) = φ0 + Σ φi, bu yerda φ0 — o'rtacha bashorat, φi — i-belgining hissasi. Daraxtli modellar uchun TreeExplainer aniq Shapley qiymatlarini polinomial vaqtda hisoblaydi, bu uni sanoatda standartga aylantirdi. Neyron tarmoqlar uchun gradientga asoslangan usullar (Integrated Gradients, Grad-CAM) qo'shimcha imkoniyat beradi.</a:t>
+              <a:t>Metrikalar odatda farq (difference, ideal 0) yoki nisbat (ratio, ideal 1) ko'rinishida hisoblanadi. AQSh bandlik amaliyotidan kelgan «to'rtdan besh qoidasi» (four-fifths rule) ga ko'ra, ijobiy qaror ulushlari nisbati 0,8 dan past bo'lsa, bu nomutanosib ta'sir (disparate impact) belgisi hisoblanadi — ko'p auditlarda shu chegara qo'llaniladi.</a:t>
             </a:r>
           </a:p>
           <a:p/>
           <a:p>
             <a:r>
-              <a:t>XAI ning cheklovlari jiddiy. Tushuntirish — bu modelning soddalashtirilgan tasviri, va u o'zi noto'g'ri bo'lishi mumkin; turli usullar bir xil bashorat uchun turlicha tushuntirish berishi mumkin; korrelyatsiyalangan belgilar SHAP qiymatlarini «bo'lishib» oladi; foydalanuvchi tushuntirishga haddan tashqari ishonib, modelni tanqidiy baholashni to'xtatishi mumkin (avtomatlashtirish noxolisligi). Shu sababli EU AI Act 13-moddasi «foydalanuvchi natijani to'g'ri talqin qila olishi» ni talab qiladi — bu SHAP grafigini ko'rsatish emas, balki tushuntirishni maqsadli auditoriyaga moslashtirish degani: kredit mutaxassisiga va kredit oluvchiga turli ko'rinish kerak.</a:t>
+              <a:t>Imkonsizlik teoremasi (Chouldechova, 2017; Kleinberg va boshq., 2016) shuni aytadiki, guruhlarda asosiy chastota farq qilganda va model mukammal bo'lmaganda, kalibrlash, teng yolg'on ijobiy va teng yolg'on salbiy darajalarini bir vaqtda ta'minlab bo'lmaydi. Demak, metrika tanlovi — bu qiymat tanlovi, va u hujjatlashtirilishi, manfaatdor tomonlar bilan kelishilishi kerak. Guruh metrikalaridan tashqari individual adolatlilik (o'xshash odamlarga o'xshash qarorlar) va kontrfaktual adolatlilik (himoyalangan belgi o'zgarganda qaror o'zgarmasligi) tushunchalari ham bor, lekin ular «o'xshashlik» metrikasini aniqlashni talab qiladi, bu amaliyotda qiyin.</a:t>
+            </a:r>
+          </a:p>
+          <a:p/>
+          <a:p>
+            <a:r>
+              <a:t>Noxolislikni yumshatish usullari uch bosqichga bo'linadi. Oldindan ishlov berish (pre-processing): qayta vaznlash (reweighing), tanlanmani qayta balanslash, himoyalangan belgi bilan korrelyatsiyani olib tashlash. O'qitish vaqtida (in-processing): adolatlilik cheklovi bilan optimallashtirish — Fairlearn dagi ExponentiatedGradient va GridSearch (Agarwal va boshq., 2018 reduksiya yondashuvi), adversarial debiasing. Keyingi ishlov (post-processing): guruhlar uchun turli qaror chegaralari — Fairlearn dagi ThresholdOptimizer (Hardt va boshq., 2016). Muhim ogohlantirish: himoyalangan belgini shunchaki modeldan olib tashlash («adolatlilik ko'rmaslik orqali», fairness through unawareness) ishlamaydi, chunki boshqa belgilar (pochta indeksi, ism, ta'lim muassasasi) u bilan kuchli korrelyatsiyalangan proksi bo'lib xizmat qiladi.</a:t>
+            </a:r>
+          </a:p>
+          <a:p/>
+          <a:p>
+            <a:r>
+              <a:t>Asosiy ochiq vositalar: Fairlearn (Microsoft tomonidan boshlangan, hozir mustaqil ochiq loyiha; metrikalar MetricFrame orqali, yumshatish algoritmlari, scikit-learn bilan mos) va AI Fairness 360 (IBM, 2018; 70 dan ortiq metrika va 10 dan ortiq yumshatish algoritmi, ko'proq tadqiqot yo'nalishida).</a:t>
             </a:r>
           </a:p>
         </p:txBody>
@@ -818,6 +831,88 @@
 </file>
 
 <file path=ppt/notesSlides/notesSlide5.xml><?xml version="1.0" encoding="utf-8"?>
+<p:notes xmlns:a="http://schemas.openxmlformats.org/drawingml/2006/main" xmlns:p="http://schemas.openxmlformats.org/presentationml/2006/main" xmlns:r="http://schemas.openxmlformats.org/officeDocument/2006/relationships">
+  <p:cSld>
+    <p:spTree>
+      <p:nvGrpSpPr>
+        <p:cNvPr id="1" name=""/>
+        <p:cNvGrpSpPr/>
+        <p:nvPr/>
+      </p:nvGrpSpPr>
+      <p:grpSpPr>
+        <a:xfrm>
+          <a:off x="0" y="0"/>
+          <a:ext cx="0" cy="0"/>
+          <a:chOff x="0" y="0"/>
+          <a:chExt cx="0" cy="0"/>
+        </a:xfrm>
+      </p:grpSpPr>
+      <p:sp>
+        <p:nvSpPr>
+          <p:cNvPr id="2" name="Slide Image Placeholder 1"/>
+          <p:cNvSpPr>
+            <a:spLocks noGrp="1"/>
+          </p:cNvSpPr>
+          <p:nvPr>
+            <p:ph type="sldImg" idx="2"/>
+          </p:nvPr>
+        </p:nvSpPr>
+        <p:spPr/>
+      </p:sp>
+      <p:sp>
+        <p:nvSpPr>
+          <p:cNvPr id="3" name="Notes Placeholder 2"/>
+          <p:cNvSpPr>
+            <a:spLocks noGrp="1"/>
+          </p:cNvSpPr>
+          <p:nvPr>
+            <p:ph type="body" idx="3" sz="quarter"/>
+          </p:nvPr>
+        </p:nvSpPr>
+        <p:spPr/>
+        <p:txBody>
+          <a:bodyPr/>
+          <a:lstStyle/>
+          <a:p>
+            <a:r>
+              <a:t>Shaffoflik (transparency) va tushuntirilish (explainability) bir narsa emas. Shaffoflik — tizim haqida axborotning mavjudligi: u qanday ma'lumotda o'qitilgan, qaysi maqsadda, qanday cheklovlar bilan, foydalanuvchi SI bilan muloqot qilayotganini biladimi. Tushuntirilish — aniq bir qaror yoki model xatti-harakati uchun inson tushunadigan sabab berish qobiliyati. Talqin qilinuvchanlik (interpretability) esa modelning ichki mexanizmi bevosita tushunarli ekani (chiziqli model, kichik qaror daraxti).</a:t>
+            </a:r>
+          </a:p>
+          <a:p/>
+          <a:p>
+            <a:r>
+              <a:t>XAI usullari bir nechta o'q bo'yicha tasniflanadi: lokal (bitta bashorat uchun) va global (butun model uchun); model-agnostik va modelga xos; ichki (intrinsic, model o'zi talqin qilinuvchan) va post-hoc. Eng ko'p qo'llaniladigan ikkita post-hoc model-agnostik usul — LIME (Ribeiro va boshq., 2016), bashorat atrofida lokal chiziqli surrogat quradi, va SHAP (Lundberg va Lee, 2017), kooperativ o'yinlar nazariyasidagi Shapley qiymatlariga asoslanadi va har bir belgining bashoratga hissasini additiv tarzda taqsimlaydi: f(x) = φ0 + Σ φi, bu yerda φ0 — o'rtacha bashorat, φi — i-belgining hissasi. Daraxtli modellar uchun TreeExplainer aniq Shapley qiymatlarini polinomial vaqtda hisoblaydi, bu uni sanoatda standartga aylantirdi. Neyron tarmoqlar uchun gradientga asoslangan usullar (Integrated Gradients, Grad-CAM) qo'shimcha imkoniyat beradi.</a:t>
+            </a:r>
+          </a:p>
+          <a:p/>
+          <a:p>
+            <a:r>
+              <a:t>XAI ning cheklovlari jiddiy. Tushuntirish — bu modelning soddalashtirilgan tasviri, va u o'zi noto'g'ri bo'lishi mumkin; turli usullar bir xil bashorat uchun turlicha tushuntirish berishi mumkin; korrelyatsiyalangan belgilar SHAP qiymatlarini «bo'lishib» oladi; foydalanuvchi tushuntirishga haddan tashqari ishonib, modelni tanqidiy baholashni to'xtatishi mumkin (avtomatlashtirish noxolisligi). Shu sababli EU AI Act 13-moddasi «foydalanuvchi natijani to'g'ri talqin qila olishi» ni talab qiladi — bu SHAP grafigini ko'rsatish emas, balki tushuntirishni maqsadli auditoriyaga moslashtirish degani: kredit mutaxassisiga va kredit oluvchiga turli ko'rinish kerak.</a:t>
+            </a:r>
+          </a:p>
+        </p:txBody>
+      </p:sp>
+      <p:sp>
+        <p:nvSpPr>
+          <p:cNvPr id="4" name="Slide Number Placeholder 3"/>
+          <p:cNvSpPr>
+            <a:spLocks noGrp="1"/>
+          </p:cNvSpPr>
+          <p:nvPr>
+            <p:ph type="sldNum" idx="5" sz="quarter"/>
+          </p:nvPr>
+        </p:nvSpPr>
+        <p:spPr/>
+      </p:sp>
+    </p:spTree>
+  </p:cSld>
+  <p:clrMapOvr>
+    <a:masterClrMapping/>
+  </p:clrMapOvr>
+</p:notes>
+</file>
+
+<file path=ppt/notesSlides/notesSlide6.xml><?xml version="1.0" encoding="utf-8"?>
 <p:notes xmlns:a="http://schemas.openxmlformats.org/drawingml/2006/main" xmlns:p="http://schemas.openxmlformats.org/presentationml/2006/main" xmlns:r="http://schemas.openxmlformats.org/officeDocument/2006/relationships">
   <p:cSld>
     <p:spTree>
@@ -5646,6 +5741,1538 @@
                 <a:latin typeface="Calibri"/>
               </a:rPr>
               <a:t>10</a:t>
+            </a:r>
+          </a:p>
+        </p:txBody>
+      </p:sp>
+      <p:sp>
+        <p:nvSpPr>
+          <p:cNvPr id="10" name="Rounded Rectangle 9"/>
+          <p:cNvSpPr/>
+          <p:nvPr/>
+        </p:nvSpPr>
+        <p:spPr>
+          <a:xfrm>
+            <a:off x="550000" y="2132700"/>
+            <a:ext cx="11100000" cy="1587300"/>
+          </a:xfrm>
+          <a:prstGeom prst="roundRect">
+            <a:avLst>
+              <a:gd name="adj" fmla="val 8000"/>
+            </a:avLst>
+          </a:prstGeom>
+          <a:solidFill>
+            <a:srgbClr val="F5F8FC"/>
+          </a:solidFill>
+          <a:ln>
+            <a:noFill/>
+          </a:ln>
+          <a:effectLst/>
+        </p:spPr>
+        <p:style>
+          <a:lnRef idx="1">
+            <a:schemeClr val="accent1"/>
+          </a:lnRef>
+          <a:fillRef idx="3">
+            <a:schemeClr val="accent1"/>
+          </a:fillRef>
+          <a:effectRef idx="2">
+            <a:schemeClr val="accent1"/>
+          </a:effectRef>
+          <a:fontRef idx="minor">
+            <a:schemeClr val="lt1"/>
+          </a:fontRef>
+        </p:style>
+        <p:txBody>
+          <a:bodyPr rtlCol="0" anchor="ctr"/>
+          <a:lstStyle/>
+          <a:p>
+            <a:pPr algn="ctr"/>
+          </a:p>
+        </p:txBody>
+      </p:sp>
+      <p:sp>
+        <p:nvSpPr>
+          <p:cNvPr id="11" name="Rectangle 10"/>
+          <p:cNvSpPr/>
+          <p:nvPr/>
+        </p:nvSpPr>
+        <p:spPr>
+          <a:xfrm>
+            <a:off x="550000" y="2132700"/>
+            <a:ext cx="70000" cy="1587300"/>
+          </a:xfrm>
+          <a:prstGeom prst="rect">
+            <a:avLst/>
+          </a:prstGeom>
+          <a:solidFill>
+            <a:srgbClr val="B7791F"/>
+          </a:solidFill>
+          <a:ln>
+            <a:noFill/>
+          </a:ln>
+          <a:effectLst/>
+        </p:spPr>
+        <p:style>
+          <a:lnRef idx="1">
+            <a:schemeClr val="accent1"/>
+          </a:lnRef>
+          <a:fillRef idx="3">
+            <a:schemeClr val="accent1"/>
+          </a:fillRef>
+          <a:effectRef idx="2">
+            <a:schemeClr val="accent1"/>
+          </a:effectRef>
+          <a:fontRef idx="minor">
+            <a:schemeClr val="lt1"/>
+          </a:fontRef>
+        </p:style>
+        <p:txBody>
+          <a:bodyPr rtlCol="0" anchor="ctr"/>
+          <a:lstStyle/>
+          <a:p>
+            <a:pPr algn="ctr"/>
+          </a:p>
+        </p:txBody>
+      </p:sp>
+      <p:sp>
+        <p:nvSpPr>
+          <p:cNvPr id="12" name="Oval 11"/>
+          <p:cNvSpPr/>
+          <p:nvPr/>
+        </p:nvSpPr>
+        <p:spPr>
+          <a:xfrm>
+            <a:off x="780000" y="2716350"/>
+            <a:ext cx="420000" cy="420000"/>
+          </a:xfrm>
+          <a:prstGeom prst="ellipse">
+            <a:avLst/>
+          </a:prstGeom>
+          <a:solidFill>
+            <a:srgbClr val="B7791F"/>
+          </a:solidFill>
+          <a:ln>
+            <a:noFill/>
+          </a:ln>
+          <a:effectLst/>
+        </p:spPr>
+        <p:style>
+          <a:lnRef idx="1">
+            <a:schemeClr val="accent1"/>
+          </a:lnRef>
+          <a:fillRef idx="3">
+            <a:schemeClr val="accent1"/>
+          </a:fillRef>
+          <a:effectRef idx="2">
+            <a:schemeClr val="accent1"/>
+          </a:effectRef>
+          <a:fontRef idx="minor">
+            <a:schemeClr val="lt1"/>
+          </a:fontRef>
+        </p:style>
+        <p:txBody>
+          <a:bodyPr rtlCol="0" anchor="ctr" lIns="0" rIns="0"/>
+          <a:lstStyle/>
+          <a:p>
+            <a:pPr algn="ctr"/>
+            <a:r>
+              <a:rPr sz="1400" b="1">
+                <a:solidFill>
+                  <a:srgbClr val="FFFFFF"/>
+                </a:solidFill>
+                <a:latin typeface="Calibri"/>
+              </a:rPr>
+              <a:t>4</a:t>
+            </a:r>
+          </a:p>
+        </p:txBody>
+      </p:sp>
+      <p:sp>
+        <p:nvSpPr>
+          <p:cNvPr id="13" name="TextBox 12"/>
+          <p:cNvSpPr txBox="1"/>
+          <p:nvPr/>
+        </p:nvSpPr>
+        <p:spPr>
+          <a:xfrm>
+            <a:off x="1380000" y="2172700"/>
+            <a:ext cx="10150000" cy="1507300"/>
+          </a:xfrm>
+          <a:prstGeom prst="rect">
+            <a:avLst/>
+          </a:prstGeom>
+          <a:noFill/>
+        </p:spPr>
+        <p:txBody>
+          <a:bodyPr wrap="square" anchor="ctr">
+            <a:spAutoFit/>
+          </a:bodyPr>
+          <a:lstStyle/>
+          <a:p>
+            <a:r>
+              <a:rPr sz="1600" b="1">
+                <a:solidFill>
+                  <a:srgbClr val="1F3A5F"/>
+                </a:solidFill>
+                <a:latin typeface="Calibri"/>
+              </a:rPr>
+              <a:t>Noxolislikni yumshatish usullari uch bosqichga bo'linadi.</a:t>
+            </a:r>
+          </a:p>
+          <a:p>
+            <a:pPr>
+              <a:spcBef>
+                <a:spcPts val="400"/>
+              </a:spcBef>
+            </a:pPr>
+            <a:r>
+              <a:rPr sz="1500">
+                <a:solidFill>
+                  <a:srgbClr val="334055"/>
+                </a:solidFill>
+                <a:latin typeface="Calibri"/>
+              </a:rPr>
+              <a:t>Oldindan ishlov berish (pre-processing): qayta vaznlash (reweighing), tanlanmani qayta balanslash, himoyalangan belgi bilan korrelyatsiyani olib tashlash. O'qitish vaqtida (in-processing): adolatlilik cheklovi bilan optimallashtirish — Fairlearn dagi ExponentiatedGradient va GridSearch (Agarwal va boshq., 2018 reduksiya yondashuvi), adversarial debiasing.</a:t>
+            </a:r>
+          </a:p>
+        </p:txBody>
+      </p:sp>
+      <p:sp>
+        <p:nvSpPr>
+          <p:cNvPr id="14" name="Rounded Rectangle 13"/>
+          <p:cNvSpPr/>
+          <p:nvPr/>
+        </p:nvSpPr>
+        <p:spPr>
+          <a:xfrm>
+            <a:off x="550000" y="3830000"/>
+            <a:ext cx="11100000" cy="1587300"/>
+          </a:xfrm>
+          <a:prstGeom prst="roundRect">
+            <a:avLst>
+              <a:gd name="adj" fmla="val 8000"/>
+            </a:avLst>
+          </a:prstGeom>
+          <a:solidFill>
+            <a:srgbClr val="F5F8FC"/>
+          </a:solidFill>
+          <a:ln>
+            <a:noFill/>
+          </a:ln>
+          <a:effectLst/>
+        </p:spPr>
+        <p:style>
+          <a:lnRef idx="1">
+            <a:schemeClr val="accent1"/>
+          </a:lnRef>
+          <a:fillRef idx="3">
+            <a:schemeClr val="accent1"/>
+          </a:fillRef>
+          <a:effectRef idx="2">
+            <a:schemeClr val="accent1"/>
+          </a:effectRef>
+          <a:fontRef idx="minor">
+            <a:schemeClr val="lt1"/>
+          </a:fontRef>
+        </p:style>
+        <p:txBody>
+          <a:bodyPr rtlCol="0" anchor="ctr"/>
+          <a:lstStyle/>
+          <a:p>
+            <a:pPr algn="ctr"/>
+          </a:p>
+        </p:txBody>
+      </p:sp>
+      <p:sp>
+        <p:nvSpPr>
+          <p:cNvPr id="15" name="Rectangle 14"/>
+          <p:cNvSpPr/>
+          <p:nvPr/>
+        </p:nvSpPr>
+        <p:spPr>
+          <a:xfrm>
+            <a:off x="550000" y="3830000"/>
+            <a:ext cx="70000" cy="1587300"/>
+          </a:xfrm>
+          <a:prstGeom prst="rect">
+            <a:avLst/>
+          </a:prstGeom>
+          <a:solidFill>
+            <a:srgbClr val="C0392B"/>
+          </a:solidFill>
+          <a:ln>
+            <a:noFill/>
+          </a:ln>
+          <a:effectLst/>
+        </p:spPr>
+        <p:style>
+          <a:lnRef idx="1">
+            <a:schemeClr val="accent1"/>
+          </a:lnRef>
+          <a:fillRef idx="3">
+            <a:schemeClr val="accent1"/>
+          </a:fillRef>
+          <a:effectRef idx="2">
+            <a:schemeClr val="accent1"/>
+          </a:effectRef>
+          <a:fontRef idx="minor">
+            <a:schemeClr val="lt1"/>
+          </a:fontRef>
+        </p:style>
+        <p:txBody>
+          <a:bodyPr rtlCol="0" anchor="ctr"/>
+          <a:lstStyle/>
+          <a:p>
+            <a:pPr algn="ctr"/>
+          </a:p>
+        </p:txBody>
+      </p:sp>
+      <p:sp>
+        <p:nvSpPr>
+          <p:cNvPr id="16" name="Oval 15"/>
+          <p:cNvSpPr/>
+          <p:nvPr/>
+        </p:nvSpPr>
+        <p:spPr>
+          <a:xfrm>
+            <a:off x="780000" y="4413650"/>
+            <a:ext cx="420000" cy="420000"/>
+          </a:xfrm>
+          <a:prstGeom prst="ellipse">
+            <a:avLst/>
+          </a:prstGeom>
+          <a:solidFill>
+            <a:srgbClr val="C0392B"/>
+          </a:solidFill>
+          <a:ln>
+            <a:noFill/>
+          </a:ln>
+          <a:effectLst/>
+        </p:spPr>
+        <p:style>
+          <a:lnRef idx="1">
+            <a:schemeClr val="accent1"/>
+          </a:lnRef>
+          <a:fillRef idx="3">
+            <a:schemeClr val="accent1"/>
+          </a:fillRef>
+          <a:effectRef idx="2">
+            <a:schemeClr val="accent1"/>
+          </a:effectRef>
+          <a:fontRef idx="minor">
+            <a:schemeClr val="lt1"/>
+          </a:fontRef>
+        </p:style>
+        <p:txBody>
+          <a:bodyPr rtlCol="0" anchor="ctr" lIns="0" rIns="0"/>
+          <a:lstStyle/>
+          <a:p>
+            <a:pPr algn="ctr"/>
+            <a:r>
+              <a:rPr sz="1400" b="1">
+                <a:solidFill>
+                  <a:srgbClr val="FFFFFF"/>
+                </a:solidFill>
+                <a:latin typeface="Calibri"/>
+              </a:rPr>
+              <a:t>5</a:t>
+            </a:r>
+          </a:p>
+        </p:txBody>
+      </p:sp>
+      <p:sp>
+        <p:nvSpPr>
+          <p:cNvPr id="17" name="TextBox 16"/>
+          <p:cNvSpPr txBox="1"/>
+          <p:nvPr/>
+        </p:nvSpPr>
+        <p:spPr>
+          <a:xfrm>
+            <a:off x="1380000" y="3870000"/>
+            <a:ext cx="10150000" cy="1507300"/>
+          </a:xfrm>
+          <a:prstGeom prst="rect">
+            <a:avLst/>
+          </a:prstGeom>
+          <a:noFill/>
+        </p:spPr>
+        <p:txBody>
+          <a:bodyPr wrap="square" anchor="ctr">
+            <a:spAutoFit/>
+          </a:bodyPr>
+          <a:lstStyle/>
+          <a:p>
+            <a:r>
+              <a:rPr sz="1500" b="0">
+                <a:solidFill>
+                  <a:srgbClr val="1B2430"/>
+                </a:solidFill>
+                <a:latin typeface="Calibri"/>
+              </a:rPr>
+              <a:t>Asosiy ochiq vositalar: Fairlearn (Microsoft tomonidan boshlangan, hozir mustaqil ochiq loyiha; metrikalar MetricFrame orqali, yumshatish algoritmlari, scikit-learn bilan mos) va AI Fairness 360 (IBM, 2018; 70 dan ortiq metrika va 10 dan ortiq yumshatish…</a:t>
+            </a:r>
+          </a:p>
+        </p:txBody>
+      </p:sp>
+    </p:spTree>
+  </p:cSld>
+  <p:clrMapOvr>
+    <a:masterClrMapping/>
+  </p:clrMapOvr>
+  <p:transition spd="med">
+    <p:fade/>
+  </p:transition>
+  <p:timing>
+    <p:tnLst>
+      <p:par>
+        <p:cTn id="1" dur="indefinite" restart="never" nodeType="tmRoot">
+          <p:childTnLst>
+            <p:seq concurrent="1" nextAc="seek">
+              <p:cTn id="2" dur="indefinite" nodeType="mainSeq">
+                <p:childTnLst>
+                  <p:par>
+                    <p:cTn id="55" fill="hold">
+                      <p:stCondLst>
+                        <p:cond delay="indefinite"/>
+                        <p:cond evt="onBegin" delay="0">
+                          <p:tn val="2"/>
+                        </p:cond>
+                      </p:stCondLst>
+                      <p:childTnLst>
+                        <p:par>
+                          <p:cTn id="3" fill="hold">
+                            <p:stCondLst>
+                              <p:cond delay="0"/>
+                            </p:stCondLst>
+                            <p:childTnLst>
+                              <p:par>
+                                <p:cTn id="4" presetID="10" presetClass="entr" presetSubtype="0" fill="hold" grpId="0" nodeType="withEffect">
+                                  <p:stCondLst>
+                                    <p:cond delay="0"/>
+                                  </p:stCondLst>
+                                  <p:childTnLst>
+                                    <p:set>
+                                      <p:cBhvr>
+                                        <p:cTn id="5" dur="1" fill="hold">
+                                          <p:stCondLst>
+                                            <p:cond delay="0"/>
+                                          </p:stCondLst>
+                                        </p:cTn>
+                                        <p:tgtEl>
+                                          <p:spTgt spid="6"/>
+                                        </p:tgtEl>
+                                        <p:attrNameLst>
+                                          <p:attrName>style.visibility</p:attrName>
+                                        </p:attrNameLst>
+                                      </p:cBhvr>
+                                      <p:to>
+                                        <p:strVal val="visible"/>
+                                      </p:to>
+                                    </p:set>
+                                    <p:animEffect transition="in" filter="fade">
+                                      <p:cBhvr>
+                                        <p:cTn id="6" dur="550"/>
+                                        <p:tgtEl>
+                                          <p:spTgt spid="6"/>
+                                        </p:tgtEl>
+                                      </p:cBhvr>
+                                    </p:animEffect>
+                                  </p:childTnLst>
+                                </p:cTn>
+                              </p:par>
+                            </p:childTnLst>
+                          </p:cTn>
+                        </p:par>
+                        <p:par>
+                          <p:cTn id="7" fill="hold">
+                            <p:stCondLst>
+                              <p:cond delay="220"/>
+                            </p:stCondLst>
+                            <p:childTnLst>
+                              <p:par>
+                                <p:cTn id="8" presetID="42" presetClass="entr" presetSubtype="0" fill="hold" grpId="0" nodeType="afterEffect">
+                                  <p:stCondLst>
+                                    <p:cond delay="0"/>
+                                  </p:stCondLst>
+                                  <p:childTnLst>
+                                    <p:set>
+                                      <p:cBhvr>
+                                        <p:cTn id="9" dur="1" fill="hold">
+                                          <p:stCondLst>
+                                            <p:cond delay="0"/>
+                                          </p:stCondLst>
+                                        </p:cTn>
+                                        <p:tgtEl>
+                                          <p:spTgt spid="10"/>
+                                        </p:tgtEl>
+                                        <p:attrNameLst>
+                                          <p:attrName>style.visibility</p:attrName>
+                                        </p:attrNameLst>
+                                      </p:cBhvr>
+                                      <p:to>
+                                        <p:strVal val="visible"/>
+                                      </p:to>
+                                    </p:set>
+                                    <p:animEffect transition="in" filter="fade">
+                                      <p:cBhvr>
+                                        <p:cTn id="10" dur="550"/>
+                                        <p:tgtEl>
+                                          <p:spTgt spid="10"/>
+                                        </p:tgtEl>
+                                      </p:cBhvr>
+                                    </p:animEffect>
+                                    <p:anim calcmode="lin" valueType="num">
+                                      <p:cBhvr additive="base">
+                                        <p:cTn id="11" dur="550" fill="hold"/>
+                                        <p:tgtEl>
+                                          <p:spTgt spid="10"/>
+                                        </p:tgtEl>
+                                        <p:attrNameLst>
+                                          <p:attrName>ppt_x</p:attrName>
+                                        </p:attrNameLst>
+                                      </p:cBhvr>
+                                      <p:tavLst>
+                                        <p:tav tm="0">
+                                          <p:val>
+                                            <p:strVal val="#ppt_x"/>
+                                          </p:val>
+                                        </p:tav>
+                                        <p:tav tm="100000">
+                                          <p:val>
+                                            <p:strVal val="#ppt_x"/>
+                                          </p:val>
+                                        </p:tav>
+                                      </p:tavLst>
+                                    </p:anim>
+                                    <p:anim calcmode="lin" valueType="num">
+                                      <p:cBhvr additive="base">
+                                        <p:cTn id="12" dur="550" fill="hold"/>
+                                        <p:tgtEl>
+                                          <p:spTgt spid="10"/>
+                                        </p:tgtEl>
+                                        <p:attrNameLst>
+                                          <p:attrName>ppt_y</p:attrName>
+                                        </p:attrNameLst>
+                                      </p:cBhvr>
+                                      <p:tavLst>
+                                        <p:tav tm="0">
+                                          <p:val>
+                                            <p:strVal val="#ppt_y+.08"/>
+                                          </p:val>
+                                        </p:tav>
+                                        <p:tav tm="100000">
+                                          <p:val>
+                                            <p:strVal val="#ppt_y"/>
+                                          </p:val>
+                                        </p:tav>
+                                      </p:tavLst>
+                                    </p:anim>
+                                  </p:childTnLst>
+                                </p:cTn>
+                              </p:par>
+                            </p:childTnLst>
+                          </p:cTn>
+                        </p:par>
+                        <p:par>
+                          <p:cTn id="13" fill="hold">
+                            <p:stCondLst>
+                              <p:cond delay="220"/>
+                            </p:stCondLst>
+                            <p:childTnLst>
+                              <p:par>
+                                <p:cTn id="14" presetID="42" presetClass="entr" presetSubtype="0" fill="hold" grpId="0" nodeType="afterEffect">
+                                  <p:stCondLst>
+                                    <p:cond delay="0"/>
+                                  </p:stCondLst>
+                                  <p:childTnLst>
+                                    <p:set>
+                                      <p:cBhvr>
+                                        <p:cTn id="15" dur="1" fill="hold">
+                                          <p:stCondLst>
+                                            <p:cond delay="0"/>
+                                          </p:stCondLst>
+                                        </p:cTn>
+                                        <p:tgtEl>
+                                          <p:spTgt spid="11"/>
+                                        </p:tgtEl>
+                                        <p:attrNameLst>
+                                          <p:attrName>style.visibility</p:attrName>
+                                        </p:attrNameLst>
+                                      </p:cBhvr>
+                                      <p:to>
+                                        <p:strVal val="visible"/>
+                                      </p:to>
+                                    </p:set>
+                                    <p:animEffect transition="in" filter="fade">
+                                      <p:cBhvr>
+                                        <p:cTn id="16" dur="550"/>
+                                        <p:tgtEl>
+                                          <p:spTgt spid="11"/>
+                                        </p:tgtEl>
+                                      </p:cBhvr>
+                                    </p:animEffect>
+                                    <p:anim calcmode="lin" valueType="num">
+                                      <p:cBhvr additive="base">
+                                        <p:cTn id="17" dur="550" fill="hold"/>
+                                        <p:tgtEl>
+                                          <p:spTgt spid="11"/>
+                                        </p:tgtEl>
+                                        <p:attrNameLst>
+                                          <p:attrName>ppt_x</p:attrName>
+                                        </p:attrNameLst>
+                                      </p:cBhvr>
+                                      <p:tavLst>
+                                        <p:tav tm="0">
+                                          <p:val>
+                                            <p:strVal val="#ppt_x"/>
+                                          </p:val>
+                                        </p:tav>
+                                        <p:tav tm="100000">
+                                          <p:val>
+                                            <p:strVal val="#ppt_x"/>
+                                          </p:val>
+                                        </p:tav>
+                                      </p:tavLst>
+                                    </p:anim>
+                                    <p:anim calcmode="lin" valueType="num">
+                                      <p:cBhvr additive="base">
+                                        <p:cTn id="18" dur="550" fill="hold"/>
+                                        <p:tgtEl>
+                                          <p:spTgt spid="11"/>
+                                        </p:tgtEl>
+                                        <p:attrNameLst>
+                                          <p:attrName>ppt_y</p:attrName>
+                                        </p:attrNameLst>
+                                      </p:cBhvr>
+                                      <p:tavLst>
+                                        <p:tav tm="0">
+                                          <p:val>
+                                            <p:strVal val="#ppt_y+.08"/>
+                                          </p:val>
+                                        </p:tav>
+                                        <p:tav tm="100000">
+                                          <p:val>
+                                            <p:strVal val="#ppt_y"/>
+                                          </p:val>
+                                        </p:tav>
+                                      </p:tavLst>
+                                    </p:anim>
+                                  </p:childTnLst>
+                                </p:cTn>
+                              </p:par>
+                            </p:childTnLst>
+                          </p:cTn>
+                        </p:par>
+                        <p:par>
+                          <p:cTn id="19" fill="hold">
+                            <p:stCondLst>
+                              <p:cond delay="220"/>
+                            </p:stCondLst>
+                            <p:childTnLst>
+                              <p:par>
+                                <p:cTn id="20" presetID="53" presetClass="entr" presetSubtype="16" fill="hold" grpId="0" nodeType="afterEffect">
+                                  <p:stCondLst>
+                                    <p:cond delay="0"/>
+                                  </p:stCondLst>
+                                  <p:childTnLst>
+                                    <p:set>
+                                      <p:cBhvr>
+                                        <p:cTn id="21" dur="1" fill="hold">
+                                          <p:stCondLst>
+                                            <p:cond delay="0"/>
+                                          </p:stCondLst>
+                                        </p:cTn>
+                                        <p:tgtEl>
+                                          <p:spTgt spid="12"/>
+                                        </p:tgtEl>
+                                        <p:attrNameLst>
+                                          <p:attrName>style.visibility</p:attrName>
+                                        </p:attrNameLst>
+                                      </p:cBhvr>
+                                      <p:to>
+                                        <p:strVal val="visible"/>
+                                      </p:to>
+                                    </p:set>
+                                    <p:animEffect transition="in" filter="fade">
+                                      <p:cBhvr>
+                                        <p:cTn id="22" dur="550"/>
+                                        <p:tgtEl>
+                                          <p:spTgt spid="12"/>
+                                        </p:tgtEl>
+                                      </p:cBhvr>
+                                    </p:animEffect>
+                                    <p:anim calcmode="lin" valueType="num">
+                                      <p:cBhvr additive="base">
+                                        <p:cTn id="23" dur="550" fill="hold"/>
+                                        <p:tgtEl>
+                                          <p:spTgt spid="12"/>
+                                        </p:tgtEl>
+                                        <p:attrNameLst>
+                                          <p:attrName>ppt_w</p:attrName>
+                                        </p:attrNameLst>
+                                      </p:cBhvr>
+                                      <p:tavLst>
+                                        <p:tav tm="0">
+                                          <p:val>
+                                            <p:strVal val="0"/>
+                                          </p:val>
+                                        </p:tav>
+                                        <p:tav tm="100000">
+                                          <p:val>
+                                            <p:strVal val="#ppt_w"/>
+                                          </p:val>
+                                        </p:tav>
+                                      </p:tavLst>
+                                    </p:anim>
+                                    <p:anim calcmode="lin" valueType="num">
+                                      <p:cBhvr additive="base">
+                                        <p:cTn id="24" dur="550" fill="hold"/>
+                                        <p:tgtEl>
+                                          <p:spTgt spid="12"/>
+                                        </p:tgtEl>
+                                        <p:attrNameLst>
+                                          <p:attrName>ppt_h</p:attrName>
+                                        </p:attrNameLst>
+                                      </p:cBhvr>
+                                      <p:tavLst>
+                                        <p:tav tm="0">
+                                          <p:val>
+                                            <p:strVal val="0"/>
+                                          </p:val>
+                                        </p:tav>
+                                        <p:tav tm="100000">
+                                          <p:val>
+                                            <p:strVal val="#ppt_h"/>
+                                          </p:val>
+                                        </p:tav>
+                                      </p:tavLst>
+                                    </p:anim>
+                                  </p:childTnLst>
+                                </p:cTn>
+                              </p:par>
+                            </p:childTnLst>
+                          </p:cTn>
+                        </p:par>
+                        <p:par>
+                          <p:cTn id="25" fill="hold">
+                            <p:stCondLst>
+                              <p:cond delay="220"/>
+                            </p:stCondLst>
+                            <p:childTnLst>
+                              <p:par>
+                                <p:cTn id="26" presetID="42" presetClass="entr" presetSubtype="0" fill="hold" grpId="0" nodeType="afterEffect">
+                                  <p:stCondLst>
+                                    <p:cond delay="0"/>
+                                  </p:stCondLst>
+                                  <p:childTnLst>
+                                    <p:set>
+                                      <p:cBhvr>
+                                        <p:cTn id="27" dur="1" fill="hold">
+                                          <p:stCondLst>
+                                            <p:cond delay="0"/>
+                                          </p:stCondLst>
+                                        </p:cTn>
+                                        <p:tgtEl>
+                                          <p:spTgt spid="13"/>
+                                        </p:tgtEl>
+                                        <p:attrNameLst>
+                                          <p:attrName>style.visibility</p:attrName>
+                                        </p:attrNameLst>
+                                      </p:cBhvr>
+                                      <p:to>
+                                        <p:strVal val="visible"/>
+                                      </p:to>
+                                    </p:set>
+                                    <p:animEffect transition="in" filter="fade">
+                                      <p:cBhvr>
+                                        <p:cTn id="28" dur="550"/>
+                                        <p:tgtEl>
+                                          <p:spTgt spid="13"/>
+                                        </p:tgtEl>
+                                      </p:cBhvr>
+                                    </p:animEffect>
+                                    <p:anim calcmode="lin" valueType="num">
+                                      <p:cBhvr additive="base">
+                                        <p:cTn id="29" dur="550" fill="hold"/>
+                                        <p:tgtEl>
+                                          <p:spTgt spid="13"/>
+                                        </p:tgtEl>
+                                        <p:attrNameLst>
+                                          <p:attrName>ppt_x</p:attrName>
+                                        </p:attrNameLst>
+                                      </p:cBhvr>
+                                      <p:tavLst>
+                                        <p:tav tm="0">
+                                          <p:val>
+                                            <p:strVal val="#ppt_x"/>
+                                          </p:val>
+                                        </p:tav>
+                                        <p:tav tm="100000">
+                                          <p:val>
+                                            <p:strVal val="#ppt_x"/>
+                                          </p:val>
+                                        </p:tav>
+                                      </p:tavLst>
+                                    </p:anim>
+                                    <p:anim calcmode="lin" valueType="num">
+                                      <p:cBhvr additive="base">
+                                        <p:cTn id="30" dur="550" fill="hold"/>
+                                        <p:tgtEl>
+                                          <p:spTgt spid="13"/>
+                                        </p:tgtEl>
+                                        <p:attrNameLst>
+                                          <p:attrName>ppt_y</p:attrName>
+                                        </p:attrNameLst>
+                                      </p:cBhvr>
+                                      <p:tavLst>
+                                        <p:tav tm="0">
+                                          <p:val>
+                                            <p:strVal val="#ppt_y+.08"/>
+                                          </p:val>
+                                        </p:tav>
+                                        <p:tav tm="100000">
+                                          <p:val>
+                                            <p:strVal val="#ppt_y"/>
+                                          </p:val>
+                                        </p:tav>
+                                      </p:tavLst>
+                                    </p:anim>
+                                  </p:childTnLst>
+                                </p:cTn>
+                              </p:par>
+                            </p:childTnLst>
+                          </p:cTn>
+                        </p:par>
+                        <p:par>
+                          <p:cTn id="31" fill="hold">
+                            <p:stCondLst>
+                              <p:cond delay="440"/>
+                            </p:stCondLst>
+                            <p:childTnLst>
+                              <p:par>
+                                <p:cTn id="32" presetID="42" presetClass="entr" presetSubtype="0" fill="hold" grpId="0" nodeType="afterEffect">
+                                  <p:stCondLst>
+                                    <p:cond delay="0"/>
+                                  </p:stCondLst>
+                                  <p:childTnLst>
+                                    <p:set>
+                                      <p:cBhvr>
+                                        <p:cTn id="33" dur="1" fill="hold">
+                                          <p:stCondLst>
+                                            <p:cond delay="0"/>
+                                          </p:stCondLst>
+                                        </p:cTn>
+                                        <p:tgtEl>
+                                          <p:spTgt spid="14"/>
+                                        </p:tgtEl>
+                                        <p:attrNameLst>
+                                          <p:attrName>style.visibility</p:attrName>
+                                        </p:attrNameLst>
+                                      </p:cBhvr>
+                                      <p:to>
+                                        <p:strVal val="visible"/>
+                                      </p:to>
+                                    </p:set>
+                                    <p:animEffect transition="in" filter="fade">
+                                      <p:cBhvr>
+                                        <p:cTn id="34" dur="550"/>
+                                        <p:tgtEl>
+                                          <p:spTgt spid="14"/>
+                                        </p:tgtEl>
+                                      </p:cBhvr>
+                                    </p:animEffect>
+                                    <p:anim calcmode="lin" valueType="num">
+                                      <p:cBhvr additive="base">
+                                        <p:cTn id="35" dur="550" fill="hold"/>
+                                        <p:tgtEl>
+                                          <p:spTgt spid="14"/>
+                                        </p:tgtEl>
+                                        <p:attrNameLst>
+                                          <p:attrName>ppt_x</p:attrName>
+                                        </p:attrNameLst>
+                                      </p:cBhvr>
+                                      <p:tavLst>
+                                        <p:tav tm="0">
+                                          <p:val>
+                                            <p:strVal val="#ppt_x"/>
+                                          </p:val>
+                                        </p:tav>
+                                        <p:tav tm="100000">
+                                          <p:val>
+                                            <p:strVal val="#ppt_x"/>
+                                          </p:val>
+                                        </p:tav>
+                                      </p:tavLst>
+                                    </p:anim>
+                                    <p:anim calcmode="lin" valueType="num">
+                                      <p:cBhvr additive="base">
+                                        <p:cTn id="36" dur="550" fill="hold"/>
+                                        <p:tgtEl>
+                                          <p:spTgt spid="14"/>
+                                        </p:tgtEl>
+                                        <p:attrNameLst>
+                                          <p:attrName>ppt_y</p:attrName>
+                                        </p:attrNameLst>
+                                      </p:cBhvr>
+                                      <p:tavLst>
+                                        <p:tav tm="0">
+                                          <p:val>
+                                            <p:strVal val="#ppt_y+.08"/>
+                                          </p:val>
+                                        </p:tav>
+                                        <p:tav tm="100000">
+                                          <p:val>
+                                            <p:strVal val="#ppt_y"/>
+                                          </p:val>
+                                        </p:tav>
+                                      </p:tavLst>
+                                    </p:anim>
+                                  </p:childTnLst>
+                                </p:cTn>
+                              </p:par>
+                            </p:childTnLst>
+                          </p:cTn>
+                        </p:par>
+                        <p:par>
+                          <p:cTn id="37" fill="hold">
+                            <p:stCondLst>
+                              <p:cond delay="440"/>
+                            </p:stCondLst>
+                            <p:childTnLst>
+                              <p:par>
+                                <p:cTn id="38" presetID="42" presetClass="entr" presetSubtype="0" fill="hold" grpId="0" nodeType="afterEffect">
+                                  <p:stCondLst>
+                                    <p:cond delay="0"/>
+                                  </p:stCondLst>
+                                  <p:childTnLst>
+                                    <p:set>
+                                      <p:cBhvr>
+                                        <p:cTn id="39" dur="1" fill="hold">
+                                          <p:stCondLst>
+                                            <p:cond delay="0"/>
+                                          </p:stCondLst>
+                                        </p:cTn>
+                                        <p:tgtEl>
+                                          <p:spTgt spid="15"/>
+                                        </p:tgtEl>
+                                        <p:attrNameLst>
+                                          <p:attrName>style.visibility</p:attrName>
+                                        </p:attrNameLst>
+                                      </p:cBhvr>
+                                      <p:to>
+                                        <p:strVal val="visible"/>
+                                      </p:to>
+                                    </p:set>
+                                    <p:animEffect transition="in" filter="fade">
+                                      <p:cBhvr>
+                                        <p:cTn id="40" dur="550"/>
+                                        <p:tgtEl>
+                                          <p:spTgt spid="15"/>
+                                        </p:tgtEl>
+                                      </p:cBhvr>
+                                    </p:animEffect>
+                                    <p:anim calcmode="lin" valueType="num">
+                                      <p:cBhvr additive="base">
+                                        <p:cTn id="41" dur="550" fill="hold"/>
+                                        <p:tgtEl>
+                                          <p:spTgt spid="15"/>
+                                        </p:tgtEl>
+                                        <p:attrNameLst>
+                                          <p:attrName>ppt_x</p:attrName>
+                                        </p:attrNameLst>
+                                      </p:cBhvr>
+                                      <p:tavLst>
+                                        <p:tav tm="0">
+                                          <p:val>
+                                            <p:strVal val="#ppt_x"/>
+                                          </p:val>
+                                        </p:tav>
+                                        <p:tav tm="100000">
+                                          <p:val>
+                                            <p:strVal val="#ppt_x"/>
+                                          </p:val>
+                                        </p:tav>
+                                      </p:tavLst>
+                                    </p:anim>
+                                    <p:anim calcmode="lin" valueType="num">
+                                      <p:cBhvr additive="base">
+                                        <p:cTn id="42" dur="550" fill="hold"/>
+                                        <p:tgtEl>
+                                          <p:spTgt spid="15"/>
+                                        </p:tgtEl>
+                                        <p:attrNameLst>
+                                          <p:attrName>ppt_y</p:attrName>
+                                        </p:attrNameLst>
+                                      </p:cBhvr>
+                                      <p:tavLst>
+                                        <p:tav tm="0">
+                                          <p:val>
+                                            <p:strVal val="#ppt_y+.08"/>
+                                          </p:val>
+                                        </p:tav>
+                                        <p:tav tm="100000">
+                                          <p:val>
+                                            <p:strVal val="#ppt_y"/>
+                                          </p:val>
+                                        </p:tav>
+                                      </p:tavLst>
+                                    </p:anim>
+                                  </p:childTnLst>
+                                </p:cTn>
+                              </p:par>
+                            </p:childTnLst>
+                          </p:cTn>
+                        </p:par>
+                        <p:par>
+                          <p:cTn id="43" fill="hold">
+                            <p:stCondLst>
+                              <p:cond delay="440"/>
+                            </p:stCondLst>
+                            <p:childTnLst>
+                              <p:par>
+                                <p:cTn id="44" presetID="53" presetClass="entr" presetSubtype="16" fill="hold" grpId="0" nodeType="afterEffect">
+                                  <p:stCondLst>
+                                    <p:cond delay="0"/>
+                                  </p:stCondLst>
+                                  <p:childTnLst>
+                                    <p:set>
+                                      <p:cBhvr>
+                                        <p:cTn id="45" dur="1" fill="hold">
+                                          <p:stCondLst>
+                                            <p:cond delay="0"/>
+                                          </p:stCondLst>
+                                        </p:cTn>
+                                        <p:tgtEl>
+                                          <p:spTgt spid="16"/>
+                                        </p:tgtEl>
+                                        <p:attrNameLst>
+                                          <p:attrName>style.visibility</p:attrName>
+                                        </p:attrNameLst>
+                                      </p:cBhvr>
+                                      <p:to>
+                                        <p:strVal val="visible"/>
+                                      </p:to>
+                                    </p:set>
+                                    <p:animEffect transition="in" filter="fade">
+                                      <p:cBhvr>
+                                        <p:cTn id="46" dur="550"/>
+                                        <p:tgtEl>
+                                          <p:spTgt spid="16"/>
+                                        </p:tgtEl>
+                                      </p:cBhvr>
+                                    </p:animEffect>
+                                    <p:anim calcmode="lin" valueType="num">
+                                      <p:cBhvr additive="base">
+                                        <p:cTn id="47" dur="550" fill="hold"/>
+                                        <p:tgtEl>
+                                          <p:spTgt spid="16"/>
+                                        </p:tgtEl>
+                                        <p:attrNameLst>
+                                          <p:attrName>ppt_w</p:attrName>
+                                        </p:attrNameLst>
+                                      </p:cBhvr>
+                                      <p:tavLst>
+                                        <p:tav tm="0">
+                                          <p:val>
+                                            <p:strVal val="0"/>
+                                          </p:val>
+                                        </p:tav>
+                                        <p:tav tm="100000">
+                                          <p:val>
+                                            <p:strVal val="#ppt_w"/>
+                                          </p:val>
+                                        </p:tav>
+                                      </p:tavLst>
+                                    </p:anim>
+                                    <p:anim calcmode="lin" valueType="num">
+                                      <p:cBhvr additive="base">
+                                        <p:cTn id="48" dur="550" fill="hold"/>
+                                        <p:tgtEl>
+                                          <p:spTgt spid="16"/>
+                                        </p:tgtEl>
+                                        <p:attrNameLst>
+                                          <p:attrName>ppt_h</p:attrName>
+                                        </p:attrNameLst>
+                                      </p:cBhvr>
+                                      <p:tavLst>
+                                        <p:tav tm="0">
+                                          <p:val>
+                                            <p:strVal val="0"/>
+                                          </p:val>
+                                        </p:tav>
+                                        <p:tav tm="100000">
+                                          <p:val>
+                                            <p:strVal val="#ppt_h"/>
+                                          </p:val>
+                                        </p:tav>
+                                      </p:tavLst>
+                                    </p:anim>
+                                  </p:childTnLst>
+                                </p:cTn>
+                              </p:par>
+                            </p:childTnLst>
+                          </p:cTn>
+                        </p:par>
+                        <p:par>
+                          <p:cTn id="49" fill="hold">
+                            <p:stCondLst>
+                              <p:cond delay="440"/>
+                            </p:stCondLst>
+                            <p:childTnLst>
+                              <p:par>
+                                <p:cTn id="50" presetID="42" presetClass="entr" presetSubtype="0" fill="hold" grpId="0" nodeType="afterEffect">
+                                  <p:stCondLst>
+                                    <p:cond delay="0"/>
+                                  </p:stCondLst>
+                                  <p:childTnLst>
+                                    <p:set>
+                                      <p:cBhvr>
+                                        <p:cTn id="51" dur="1" fill="hold">
+                                          <p:stCondLst>
+                                            <p:cond delay="0"/>
+                                          </p:stCondLst>
+                                        </p:cTn>
+                                        <p:tgtEl>
+                                          <p:spTgt spid="17"/>
+                                        </p:tgtEl>
+                                        <p:attrNameLst>
+                                          <p:attrName>style.visibility</p:attrName>
+                                        </p:attrNameLst>
+                                      </p:cBhvr>
+                                      <p:to>
+                                        <p:strVal val="visible"/>
+                                      </p:to>
+                                    </p:set>
+                                    <p:animEffect transition="in" filter="fade">
+                                      <p:cBhvr>
+                                        <p:cTn id="52" dur="550"/>
+                                        <p:tgtEl>
+                                          <p:spTgt spid="17"/>
+                                        </p:tgtEl>
+                                      </p:cBhvr>
+                                    </p:animEffect>
+                                    <p:anim calcmode="lin" valueType="num">
+                                      <p:cBhvr additive="base">
+                                        <p:cTn id="53" dur="550" fill="hold"/>
+                                        <p:tgtEl>
+                                          <p:spTgt spid="17"/>
+                                        </p:tgtEl>
+                                        <p:attrNameLst>
+                                          <p:attrName>ppt_x</p:attrName>
+                                        </p:attrNameLst>
+                                      </p:cBhvr>
+                                      <p:tavLst>
+                                        <p:tav tm="0">
+                                          <p:val>
+                                            <p:strVal val="#ppt_x"/>
+                                          </p:val>
+                                        </p:tav>
+                                        <p:tav tm="100000">
+                                          <p:val>
+                                            <p:strVal val="#ppt_x"/>
+                                          </p:val>
+                                        </p:tav>
+                                      </p:tavLst>
+                                    </p:anim>
+                                    <p:anim calcmode="lin" valueType="num">
+                                      <p:cBhvr additive="base">
+                                        <p:cTn id="54" dur="550" fill="hold"/>
+                                        <p:tgtEl>
+                                          <p:spTgt spid="17"/>
+                                        </p:tgtEl>
+                                        <p:attrNameLst>
+                                          <p:attrName>ppt_y</p:attrName>
+                                        </p:attrNameLst>
+                                      </p:cBhvr>
+                                      <p:tavLst>
+                                        <p:tav tm="0">
+                                          <p:val>
+                                            <p:strVal val="#ppt_y+.08"/>
+                                          </p:val>
+                                        </p:tav>
+                                        <p:tav tm="100000">
+                                          <p:val>
+                                            <p:strVal val="#ppt_y"/>
+                                          </p:val>
+                                        </p:tav>
+                                      </p:tavLst>
+                                    </p:anim>
+                                  </p:childTnLst>
+                                </p:cTn>
+                              </p:par>
+                            </p:childTnLst>
+                          </p:cTn>
+                        </p:par>
+                      </p:childTnLst>
+                    </p:cTn>
+                  </p:par>
+                </p:childTnLst>
+              </p:cTn>
+              <p:prevCondLst>
+                <p:cond evt="onPrev" delay="0">
+                  <p:tgtEl>
+                    <p:sldTgt/>
+                  </p:tgtEl>
+                </p:cond>
+              </p:prevCondLst>
+              <p:nextCondLst>
+                <p:cond evt="onNext" delay="0">
+                  <p:tgtEl>
+                    <p:sldTgt/>
+                  </p:tgtEl>
+                </p:cond>
+              </p:nextCondLst>
+            </p:seq>
+          </p:childTnLst>
+        </p:cTn>
+      </p:par>
+    </p:tnLst>
+    <p:bldLst>
+      <p:bldP spid="6" grpId="0" animBg="1"/>
+      <p:bldP spid="10" grpId="0" animBg="1"/>
+      <p:bldP spid="11" grpId="0" animBg="1"/>
+      <p:bldP spid="12" grpId="0" animBg="1"/>
+      <p:bldP spid="13" grpId="0" animBg="1"/>
+      <p:bldP spid="14" grpId="0" animBg="1"/>
+      <p:bldP spid="15" grpId="0" animBg="1"/>
+      <p:bldP spid="16" grpId="0" animBg="1"/>
+      <p:bldP spid="17" grpId="0" animBg="1"/>
+    </p:bldLst>
+  </p:timing>
+</p:sld>
+</file>
+
+<file path=ppt/slides/slide11.xml><?xml version="1.0" encoding="utf-8"?>
+<p:sld xmlns:a="http://schemas.openxmlformats.org/drawingml/2006/main" xmlns:p="http://schemas.openxmlformats.org/presentationml/2006/main" xmlns:r="http://schemas.openxmlformats.org/officeDocument/2006/relationships">
+  <p:cSld>
+    <p:spTree>
+      <p:nvGrpSpPr>
+        <p:cNvPr id="1" name=""/>
+        <p:cNvGrpSpPr/>
+        <p:nvPr/>
+      </p:nvGrpSpPr>
+      <p:grpSpPr/>
+      <p:sp>
+        <p:nvSpPr>
+          <p:cNvPr id="2" name="Rectangle 1"/>
+          <p:cNvSpPr/>
+          <p:nvPr/>
+        </p:nvSpPr>
+        <p:spPr>
+          <a:xfrm>
+            <a:off x="0" y="0"/>
+            <a:ext cx="12192000" cy="1000000"/>
+          </a:xfrm>
+          <a:prstGeom prst="rect">
+            <a:avLst/>
+          </a:prstGeom>
+          <a:gradFill rotWithShape="1">
+            <a:gsLst>
+              <a:gs pos="0">
+                <a:srgbClr val="1F3A5F"/>
+              </a:gs>
+              <a:gs pos="100000">
+                <a:srgbClr val="2D5C8F"/>
+              </a:gs>
+            </a:gsLst>
+            <a:lin scaled="0" ang="0"/>
+          </a:gradFill>
+          <a:ln>
+            <a:noFill/>
+          </a:ln>
+          <a:effectLst/>
+        </p:spPr>
+        <p:style>
+          <a:lnRef idx="1">
+            <a:schemeClr val="accent1"/>
+          </a:lnRef>
+          <a:fillRef idx="3">
+            <a:schemeClr val="accent1"/>
+          </a:fillRef>
+          <a:effectRef idx="2">
+            <a:schemeClr val="accent1"/>
+          </a:effectRef>
+          <a:fontRef idx="minor">
+            <a:schemeClr val="lt1"/>
+          </a:fontRef>
+        </p:style>
+        <p:txBody>
+          <a:bodyPr rtlCol="0" anchor="ctr"/>
+          <a:lstStyle/>
+          <a:p>
+            <a:pPr algn="ctr"/>
+          </a:p>
+        </p:txBody>
+      </p:sp>
+      <p:sp>
+        <p:nvSpPr>
+          <p:cNvPr id="3" name="Oval 2"/>
+          <p:cNvSpPr/>
+          <p:nvPr/>
+        </p:nvSpPr>
+        <p:spPr>
+          <a:xfrm>
+            <a:off x="11050000" y="-350000"/>
+            <a:ext cx="900000" cy="900000"/>
+          </a:xfrm>
+          <a:prstGeom prst="ellipse">
+            <a:avLst/>
+          </a:prstGeom>
+          <a:solidFill>
+            <a:srgbClr val="3B6EA5"/>
+          </a:solidFill>
+          <a:ln>
+            <a:noFill/>
+          </a:ln>
+          <a:effectLst/>
+        </p:spPr>
+        <p:style>
+          <a:lnRef idx="1">
+            <a:schemeClr val="accent1"/>
+          </a:lnRef>
+          <a:fillRef idx="3">
+            <a:schemeClr val="accent1"/>
+          </a:fillRef>
+          <a:effectRef idx="2">
+            <a:schemeClr val="accent1"/>
+          </a:effectRef>
+          <a:fontRef idx="minor">
+            <a:schemeClr val="lt1"/>
+          </a:fontRef>
+        </p:style>
+        <p:txBody>
+          <a:bodyPr rtlCol="0" anchor="ctr"/>
+          <a:lstStyle/>
+          <a:p>
+            <a:pPr algn="ctr"/>
+          </a:p>
+        </p:txBody>
+      </p:sp>
+      <p:sp>
+        <p:nvSpPr>
+          <p:cNvPr id="4" name="Oval 3"/>
+          <p:cNvSpPr/>
+          <p:nvPr/>
+        </p:nvSpPr>
+        <p:spPr>
+          <a:xfrm>
+            <a:off x="11550000" y="450000"/>
+            <a:ext cx="420000" cy="420000"/>
+          </a:xfrm>
+          <a:prstGeom prst="ellipse">
+            <a:avLst/>
+          </a:prstGeom>
+          <a:solidFill>
+            <a:srgbClr val="0F8B8D"/>
+          </a:solidFill>
+          <a:ln>
+            <a:noFill/>
+          </a:ln>
+          <a:effectLst/>
+        </p:spPr>
+        <p:style>
+          <a:lnRef idx="1">
+            <a:schemeClr val="accent1"/>
+          </a:lnRef>
+          <a:fillRef idx="3">
+            <a:schemeClr val="accent1"/>
+          </a:fillRef>
+          <a:effectRef idx="2">
+            <a:schemeClr val="accent1"/>
+          </a:effectRef>
+          <a:fontRef idx="minor">
+            <a:schemeClr val="lt1"/>
+          </a:fontRef>
+        </p:style>
+        <p:txBody>
+          <a:bodyPr rtlCol="0" anchor="ctr"/>
+          <a:lstStyle/>
+          <a:p>
+            <a:pPr algn="ctr"/>
+          </a:p>
+        </p:txBody>
+      </p:sp>
+      <p:sp>
+        <p:nvSpPr>
+          <p:cNvPr id="5" name="TextBox 4"/>
+          <p:cNvSpPr txBox="1"/>
+          <p:nvPr/>
+        </p:nvSpPr>
+        <p:spPr>
+          <a:xfrm>
+            <a:off x="500000" y="110000"/>
+            <a:ext cx="10300000" cy="300000"/>
+          </a:xfrm>
+          <a:prstGeom prst="rect">
+            <a:avLst/>
+          </a:prstGeom>
+          <a:noFill/>
+        </p:spPr>
+        <p:txBody>
+          <a:bodyPr wrap="square" anchor="t" lIns="50800" rIns="50800">
+            <a:spAutoFit/>
+          </a:bodyPr>
+          <a:lstStyle/>
+          <a:p>
+            <a:pPr algn="l"/>
+            <a:r>
+              <a:rPr sz="1200" b="1">
+                <a:solidFill>
+                  <a:srgbClr val="A9C4E6"/>
+                </a:solidFill>
+                <a:latin typeface="Calibri"/>
+              </a:rPr>
+              <a:t>3-REJA</a:t>
+            </a:r>
+          </a:p>
+        </p:txBody>
+      </p:sp>
+      <p:sp>
+        <p:nvSpPr>
+          <p:cNvPr id="6" name="TextBox 5"/>
+          <p:cNvSpPr txBox="1"/>
+          <p:nvPr/>
+        </p:nvSpPr>
+        <p:spPr>
+          <a:xfrm>
+            <a:off x="500000" y="330000"/>
+            <a:ext cx="10400000" cy="650000"/>
+          </a:xfrm>
+          <a:prstGeom prst="rect">
+            <a:avLst/>
+          </a:prstGeom>
+          <a:noFill/>
+        </p:spPr>
+        <p:txBody>
+          <a:bodyPr wrap="square" anchor="ctr" lIns="50800" rIns="50800">
+            <a:spAutoFit/>
+          </a:bodyPr>
+          <a:lstStyle/>
+          <a:p>
+            <a:pPr algn="l"/>
+            <a:r>
+              <a:rPr sz="2600" b="1">
+                <a:solidFill>
+                  <a:srgbClr val="FFFFFF"/>
+                </a:solidFill>
+                <a:latin typeface="Calibri"/>
+              </a:rPr>
+              <a:t>Adolatlilik (Fairness): ta'riflar, metrikalar va ziddiyatlar</a:t>
+            </a:r>
+          </a:p>
+        </p:txBody>
+      </p:sp>
+      <p:sp>
+        <p:nvSpPr>
+          <p:cNvPr id="7" name="Rectangle 6"/>
+          <p:cNvSpPr/>
+          <p:nvPr/>
+        </p:nvSpPr>
+        <p:spPr>
+          <a:xfrm>
+            <a:off x="0" y="1000000"/>
+            <a:ext cx="12192000" cy="45000"/>
+          </a:xfrm>
+          <a:prstGeom prst="rect">
+            <a:avLst/>
+          </a:prstGeom>
+          <a:solidFill>
+            <a:srgbClr val="0F8B8D"/>
+          </a:solidFill>
+          <a:ln>
+            <a:noFill/>
+          </a:ln>
+          <a:effectLst/>
+        </p:spPr>
+        <p:style>
+          <a:lnRef idx="1">
+            <a:schemeClr val="accent1"/>
+          </a:lnRef>
+          <a:fillRef idx="3">
+            <a:schemeClr val="accent1"/>
+          </a:fillRef>
+          <a:effectRef idx="2">
+            <a:schemeClr val="accent1"/>
+          </a:effectRef>
+          <a:fontRef idx="minor">
+            <a:schemeClr val="lt1"/>
+          </a:fontRef>
+        </p:style>
+        <p:txBody>
+          <a:bodyPr rtlCol="0" anchor="ctr"/>
+          <a:lstStyle/>
+          <a:p>
+            <a:pPr algn="ctr"/>
+          </a:p>
+        </p:txBody>
+      </p:sp>
+      <p:sp>
+        <p:nvSpPr>
+          <p:cNvPr id="8" name="TextBox 7"/>
+          <p:cNvSpPr txBox="1"/>
+          <p:nvPr/>
+        </p:nvSpPr>
+        <p:spPr>
+          <a:xfrm>
+            <a:off x="500000" y="6420000"/>
+            <a:ext cx="9500000" cy="300000"/>
+          </a:xfrm>
+          <a:prstGeom prst="rect">
+            <a:avLst/>
+          </a:prstGeom>
+          <a:noFill/>
+        </p:spPr>
+        <p:txBody>
+          <a:bodyPr wrap="square" anchor="t" lIns="50800" rIns="50800">
+            <a:spAutoFit/>
+          </a:bodyPr>
+          <a:lstStyle/>
+          <a:p>
+            <a:pPr algn="l"/>
+            <a:r>
+              <a:rPr sz="1000" b="0">
+                <a:solidFill>
+                  <a:srgbClr val="5B6878"/>
+                </a:solidFill>
+                <a:latin typeface="Calibri"/>
+              </a:rPr>
+              <a:t>M14 · Sun'iy intellekt tizimlarida etika, ishonchlilik va mas'uliyatli sun'iy intellekt tamoyillari</a:t>
+            </a:r>
+          </a:p>
+        </p:txBody>
+      </p:sp>
+      <p:sp>
+        <p:nvSpPr>
+          <p:cNvPr id="9" name="TextBox 8"/>
+          <p:cNvSpPr txBox="1"/>
+          <p:nvPr/>
+        </p:nvSpPr>
+        <p:spPr>
+          <a:xfrm>
+            <a:off x="10600000" y="6420000"/>
+            <a:ext cx="1100000" cy="300000"/>
+          </a:xfrm>
+          <a:prstGeom prst="rect">
+            <a:avLst/>
+          </a:prstGeom>
+          <a:noFill/>
+        </p:spPr>
+        <p:txBody>
+          <a:bodyPr wrap="square" anchor="t" lIns="50800" rIns="50800">
+            <a:spAutoFit/>
+          </a:bodyPr>
+          <a:lstStyle/>
+          <a:p>
+            <a:pPr algn="r"/>
+            <a:r>
+              <a:rPr sz="1000" b="0">
+                <a:solidFill>
+                  <a:srgbClr val="5B6878"/>
+                </a:solidFill>
+                <a:latin typeface="Calibri"/>
+              </a:rPr>
+              <a:t>11</a:t>
             </a:r>
           </a:p>
         </p:txBody>
@@ -6272,7 +7899,7 @@
 </p:sld>
 </file>
 
-<file path=ppt/slides/slide11.xml><?xml version="1.0" encoding="utf-8"?>
+<file path=ppt/slides/slide12.xml><?xml version="1.0" encoding="utf-8"?>
 <p:sld xmlns:a="http://schemas.openxmlformats.org/drawingml/2006/main" xmlns:p="http://schemas.openxmlformats.org/presentationml/2006/main" xmlns:r="http://schemas.openxmlformats.org/officeDocument/2006/relationships">
   <p:cSld>
     <p:spTree>
@@ -7184,7 +8811,7 @@
 </p:sld>
 </file>
 
-<file path=ppt/slides/slide12.xml><?xml version="1.0" encoding="utf-8"?>
+<file path=ppt/slides/slide13.xml><?xml version="1.0" encoding="utf-8"?>
 <p:sld xmlns:a="http://schemas.openxmlformats.org/drawingml/2006/main" xmlns:p="http://schemas.openxmlformats.org/presentationml/2006/main" xmlns:r="http://schemas.openxmlformats.org/officeDocument/2006/relationships">
   <p:cSld>
     <p:spTree>
@@ -7513,7 +9140,7 @@
                 </a:solidFill>
                 <a:latin typeface="Calibri"/>
               </a:rPr>
-              <a:t>12</a:t>
+              <a:t>13</a:t>
             </a:r>
           </a:p>
         </p:txBody>
@@ -7526,12 +9153,12 @@
         </p:nvSpPr>
         <p:spPr>
           <a:xfrm>
-            <a:off x="550000" y="1620000"/>
-            <a:ext cx="11100000" cy="1250000"/>
+            <a:off x="550000" y="1409780"/>
+            <a:ext cx="11100000" cy="1503480"/>
           </a:xfrm>
           <a:prstGeom prst="roundRect">
             <a:avLst>
-              <a:gd name="adj" fmla="val 18000"/>
+              <a:gd name="adj" fmla="val 8000"/>
             </a:avLst>
           </a:prstGeom>
           <a:solidFill>
@@ -7572,8 +9199,8 @@
         </p:nvSpPr>
         <p:spPr>
           <a:xfrm>
-            <a:off x="550000" y="1620000"/>
-            <a:ext cx="70000" cy="1250000"/>
+            <a:off x="550000" y="1409780"/>
+            <a:ext cx="70000" cy="1503480"/>
           </a:xfrm>
           <a:prstGeom prst="rect">
             <a:avLst/>
@@ -7616,8 +9243,8 @@
         </p:nvSpPr>
         <p:spPr>
           <a:xfrm>
-            <a:off x="800000" y="2015000"/>
-            <a:ext cx="460000" cy="460000"/>
+            <a:off x="780000" y="1951520"/>
+            <a:ext cx="420000" cy="420000"/>
           </a:xfrm>
           <a:prstGeom prst="ellipse">
             <a:avLst/>
@@ -7650,7 +9277,7 @@
           <a:p>
             <a:pPr algn="ctr"/>
             <a:r>
-              <a:rPr sz="1600" b="1">
+              <a:rPr sz="1400" b="1">
                 <a:solidFill>
                   <a:srgbClr val="FFFFFF"/>
                 </a:solidFill>
@@ -7669,8 +9296,8 @@
         </p:nvSpPr>
         <p:spPr>
           <a:xfrm>
-            <a:off x="1450000" y="1620000"/>
-            <a:ext cx="10050000" cy="1250000"/>
+            <a:off x="1380000" y="1449780"/>
+            <a:ext cx="10150000" cy="1423480"/>
           </a:xfrm>
           <a:prstGeom prst="rect">
             <a:avLst/>
@@ -7678,20 +9305,35 @@
           <a:noFill/>
         </p:spPr>
         <p:txBody>
-          <a:bodyPr wrap="square" anchor="ctr" lIns="50800" rIns="50800">
+          <a:bodyPr wrap="square" anchor="ctr">
             <a:spAutoFit/>
           </a:bodyPr>
           <a:lstStyle/>
           <a:p>
-            <a:pPr algn="l"/>
             <a:r>
-              <a:rPr sz="1600" b="0">
+              <a:rPr sz="1500" b="1">
                 <a:solidFill>
-                  <a:srgbClr val="1B2430"/>
+                  <a:srgbClr val="1F3A5F"/>
                 </a:solidFill>
                 <a:latin typeface="Calibri"/>
               </a:rPr>
-              <a:t>Shaffoflik (transparency) va tushuntirilish (explainability) bir narsa emas. Shaffoflik — tizim haqida axborotning mavjudligi: u qanday ma'lumotda o'qitilgan, qaysi maqsadda, qanday cheklovlar bilan, foydalanuvchi SI bilan muloqot qilayotganini biladimi.</a:t>
+              <a:t>Shaffoflik (transparency) va tushuntirilish (explainability) bir narsa emas.</a:t>
+            </a:r>
+          </a:p>
+          <a:p>
+            <a:pPr>
+              <a:spcBef>
+                <a:spcPts val="400"/>
+              </a:spcBef>
+            </a:pPr>
+            <a:r>
+              <a:rPr sz="1400">
+                <a:solidFill>
+                  <a:srgbClr val="334055"/>
+                </a:solidFill>
+                <a:latin typeface="Calibri"/>
+              </a:rPr>
+              <a:t>Shaffoflik — tizim haqida axborotning mavjudligi: u qanday ma'lumotda o'qitilgan, qaysi maqsadda, qanday cheklovlar bilan, foydalanuvchi SI bilan muloqot qilayotganini biladimi. Tushuntirilish — aniq bir qaror yoki model xatti-harakati uchun inson tushunadigan sabab berish qobiliyati.</a:t>
             </a:r>
           </a:p>
         </p:txBody>
@@ -7704,12 +9346,12 @@
         </p:nvSpPr>
         <p:spPr>
           <a:xfrm>
-            <a:off x="550000" y="2990000"/>
-            <a:ext cx="11100000" cy="1250000"/>
+            <a:off x="550000" y="3023260"/>
+            <a:ext cx="11100000" cy="1503480"/>
           </a:xfrm>
           <a:prstGeom prst="roundRect">
             <a:avLst>
-              <a:gd name="adj" fmla="val 18000"/>
+              <a:gd name="adj" fmla="val 8000"/>
             </a:avLst>
           </a:prstGeom>
           <a:solidFill>
@@ -7750,8 +9392,8 @@
         </p:nvSpPr>
         <p:spPr>
           <a:xfrm>
-            <a:off x="550000" y="2990000"/>
-            <a:ext cx="70000" cy="1250000"/>
+            <a:off x="550000" y="3023260"/>
+            <a:ext cx="70000" cy="1503480"/>
           </a:xfrm>
           <a:prstGeom prst="rect">
             <a:avLst/>
@@ -7794,8 +9436,8 @@
         </p:nvSpPr>
         <p:spPr>
           <a:xfrm>
-            <a:off x="800000" y="3385000"/>
-            <a:ext cx="460000" cy="460000"/>
+            <a:off x="780000" y="3565000"/>
+            <a:ext cx="420000" cy="420000"/>
           </a:xfrm>
           <a:prstGeom prst="ellipse">
             <a:avLst/>
@@ -7828,7 +9470,7 @@
           <a:p>
             <a:pPr algn="ctr"/>
             <a:r>
-              <a:rPr sz="1600" b="1">
+              <a:rPr sz="1400" b="1">
                 <a:solidFill>
                   <a:srgbClr val="FFFFFF"/>
                 </a:solidFill>
@@ -7847,8 +9489,8 @@
         </p:nvSpPr>
         <p:spPr>
           <a:xfrm>
-            <a:off x="1450000" y="2990000"/>
-            <a:ext cx="10050000" cy="1250000"/>
+            <a:off x="1380000" y="3063260"/>
+            <a:ext cx="10150000" cy="1423480"/>
           </a:xfrm>
           <a:prstGeom prst="rect">
             <a:avLst/>
@@ -7856,20 +9498,19 @@
           <a:noFill/>
         </p:spPr>
         <p:txBody>
-          <a:bodyPr wrap="square" anchor="ctr" lIns="50800" rIns="50800">
+          <a:bodyPr wrap="square" anchor="ctr">
             <a:spAutoFit/>
           </a:bodyPr>
           <a:lstStyle/>
           <a:p>
-            <a:pPr algn="l"/>
             <a:r>
-              <a:rPr sz="1600" b="0">
+              <a:rPr sz="1400" b="0">
                 <a:solidFill>
                   <a:srgbClr val="1B2430"/>
                 </a:solidFill>
                 <a:latin typeface="Calibri"/>
               </a:rPr>
-              <a:t>XAI usullari bir nechta o'q bo'yicha tasniflanadi: lokal (bitta bashorat uchun) va global (butun model uchun); model-agnostik va modelga xos; ichki (intrinsic, model o'zi talqin qilinuvchan) va post-hoc. Eng ko'p qo'llaniladigan ikkita post-hoc model-agnostik…</a:t>
+              <a:t>XAI usullari bir nechta o'q bo'yicha tasniflanadi: lokal (bitta bashorat uchun) va global (butun model uchun); model-agnostik va modelga xos; ichki (intrinsic, model o'zi talqin qilinuvchan) va post-hoc.</a:t>
             </a:r>
           </a:p>
         </p:txBody>
@@ -7882,12 +9523,12 @@
         </p:nvSpPr>
         <p:spPr>
           <a:xfrm>
-            <a:off x="550000" y="4360000"/>
-            <a:ext cx="11100000" cy="1250000"/>
+            <a:off x="550000" y="4636740"/>
+            <a:ext cx="11100000" cy="1503480"/>
           </a:xfrm>
           <a:prstGeom prst="roundRect">
             <a:avLst>
-              <a:gd name="adj" fmla="val 18000"/>
+              <a:gd name="adj" fmla="val 8000"/>
             </a:avLst>
           </a:prstGeom>
           <a:solidFill>
@@ -7928,8 +9569,8 @@
         </p:nvSpPr>
         <p:spPr>
           <a:xfrm>
-            <a:off x="550000" y="4360000"/>
-            <a:ext cx="70000" cy="1250000"/>
+            <a:off x="550000" y="4636740"/>
+            <a:ext cx="70000" cy="1503480"/>
           </a:xfrm>
           <a:prstGeom prst="rect">
             <a:avLst/>
@@ -7972,8 +9613,8 @@
         </p:nvSpPr>
         <p:spPr>
           <a:xfrm>
-            <a:off x="800000" y="4755000"/>
-            <a:ext cx="460000" cy="460000"/>
+            <a:off x="780000" y="5178480"/>
+            <a:ext cx="420000" cy="420000"/>
           </a:xfrm>
           <a:prstGeom prst="ellipse">
             <a:avLst/>
@@ -8006,7 +9647,7 @@
           <a:p>
             <a:pPr algn="ctr"/>
             <a:r>
-              <a:rPr sz="1600" b="1">
+              <a:rPr sz="1400" b="1">
                 <a:solidFill>
                   <a:srgbClr val="FFFFFF"/>
                 </a:solidFill>
@@ -8025,8 +9666,8 @@
         </p:nvSpPr>
         <p:spPr>
           <a:xfrm>
-            <a:off x="1450000" y="4360000"/>
-            <a:ext cx="10050000" cy="1250000"/>
+            <a:off x="1380000" y="4676740"/>
+            <a:ext cx="10150000" cy="1423480"/>
           </a:xfrm>
           <a:prstGeom prst="rect">
             <a:avLst/>
@@ -8034,20 +9675,35 @@
           <a:noFill/>
         </p:spPr>
         <p:txBody>
-          <a:bodyPr wrap="square" anchor="ctr" lIns="50800" rIns="50800">
+          <a:bodyPr wrap="square" anchor="ctr">
             <a:spAutoFit/>
           </a:bodyPr>
           <a:lstStyle/>
           <a:p>
-            <a:pPr algn="l"/>
             <a:r>
-              <a:rPr sz="1600" b="0">
+              <a:rPr sz="1500" b="1">
                 <a:solidFill>
-                  <a:srgbClr val="1B2430"/>
+                  <a:srgbClr val="1F3A5F"/>
                 </a:solidFill>
                 <a:latin typeface="Calibri"/>
               </a:rPr>
-              <a:t>XAI ning cheklovlari jiddiy. Tushuntirish — bu modelning soddalashtirilgan tasviri, va u o'zi noto'g'ri bo'lishi mumkin; turli usullar bir xil bashorat uchun turlicha tushuntirish berishi mumkin; korrelyatsiyalangan belgilar SHAP qiymatlarini «bo'lishib»…</a:t>
+              <a:t>XAI ning cheklovlari jiddiy.</a:t>
+            </a:r>
+          </a:p>
+          <a:p>
+            <a:pPr>
+              <a:spcBef>
+                <a:spcPts val="400"/>
+              </a:spcBef>
+            </a:pPr>
+            <a:r>
+              <a:rPr sz="1400">
+                <a:solidFill>
+                  <a:srgbClr val="334055"/>
+                </a:solidFill>
+                <a:latin typeface="Calibri"/>
+              </a:rPr>
+              <a:t>Tushuntirish — bu modelning soddalashtirilgan tasviri, va u o'zi noto'g'ri bo'lishi mumkin; turli usullar bir xil bashorat uchun turlicha tushuntirish berishi mumkin; korrelyatsiyalangan belgilar SHAP qiymatlarini «bo'lishib» oladi; foydalanuvchi tushuntirishga haddan tashqari ishonib, modelni tanqidiy baholashni to'xtatishi mumkin (avtomatlashtirish noxolisligi).</a:t>
             </a:r>
           </a:p>
         </p:txBody>
@@ -9244,7 +10900,7 @@
 </p:sld>
 </file>
 
-<file path=ppt/slides/slide13.xml><?xml version="1.0" encoding="utf-8"?>
+<file path=ppt/slides/slide14.xml><?xml version="1.0" encoding="utf-8"?>
 <p:sld xmlns:a="http://schemas.openxmlformats.org/drawingml/2006/main" xmlns:p="http://schemas.openxmlformats.org/presentationml/2006/main" xmlns:r="http://schemas.openxmlformats.org/officeDocument/2006/relationships">
   <p:cSld>
     <p:spTree>
@@ -10156,7 +11812,7 @@
 </p:sld>
 </file>
 
-<file path=ppt/slides/slide14.xml><?xml version="1.0" encoding="utf-8"?>
+<file path=ppt/slides/slide15.xml><?xml version="1.0" encoding="utf-8"?>
 <p:sld xmlns:a="http://schemas.openxmlformats.org/drawingml/2006/main" xmlns:p="http://schemas.openxmlformats.org/presentationml/2006/main" xmlns:r="http://schemas.openxmlformats.org/officeDocument/2006/relationships">
   <p:cSld>
     <p:spTree>
@@ -10485,7 +12141,7 @@
                 </a:solidFill>
                 <a:latin typeface="Calibri"/>
               </a:rPr>
-              <a:t>14</a:t>
+              <a:t>15</a:t>
             </a:r>
           </a:p>
         </p:txBody>
@@ -10498,8 +12154,8 @@
         </p:nvSpPr>
         <p:spPr>
           <a:xfrm>
-            <a:off x="550000" y="2533333"/>
-            <a:ext cx="11100000" cy="1250000"/>
+            <a:off x="550000" y="3515000"/>
+            <a:ext cx="11100000" cy="520000"/>
           </a:xfrm>
           <a:prstGeom prst="roundRect">
             <a:avLst>
@@ -10544,8 +12200,8 @@
         </p:nvSpPr>
         <p:spPr>
           <a:xfrm>
-            <a:off x="550000" y="2533333"/>
-            <a:ext cx="70000" cy="1250000"/>
+            <a:off x="550000" y="3515000"/>
+            <a:ext cx="70000" cy="520000"/>
           </a:xfrm>
           <a:prstGeom prst="rect">
             <a:avLst/>
@@ -10588,8 +12244,8 @@
         </p:nvSpPr>
         <p:spPr>
           <a:xfrm>
-            <a:off x="800000" y="2928333"/>
-            <a:ext cx="460000" cy="460000"/>
+            <a:off x="780000" y="3585000"/>
+            <a:ext cx="380000" cy="380000"/>
           </a:xfrm>
           <a:prstGeom prst="ellipse">
             <a:avLst/>
@@ -10622,7 +12278,7 @@
           <a:p>
             <a:pPr algn="ctr"/>
             <a:r>
-              <a:rPr sz="1600" b="1">
+              <a:rPr sz="1400" b="1">
                 <a:solidFill>
                   <a:srgbClr val="FFFFFF"/>
                 </a:solidFill>
@@ -10641,8 +12297,8 @@
         </p:nvSpPr>
         <p:spPr>
           <a:xfrm>
-            <a:off x="1450000" y="2533333"/>
-            <a:ext cx="10050000" cy="1250000"/>
+            <a:off x="1380000" y="3555000"/>
+            <a:ext cx="10150000" cy="440000"/>
           </a:xfrm>
           <a:prstGeom prst="rect">
             <a:avLst/>
@@ -10650,12 +12306,11 @@
           <a:noFill/>
         </p:spPr>
         <p:txBody>
-          <a:bodyPr wrap="square" anchor="ctr" lIns="50800" rIns="50800">
+          <a:bodyPr wrap="square" anchor="ctr">
             <a:spAutoFit/>
           </a:bodyPr>
           <a:lstStyle/>
           <a:p>
-            <a:pPr algn="l"/>
             <a:r>
               <a:rPr sz="1600" b="0">
                 <a:solidFill>
@@ -11132,7 +12787,7 @@
 </p:sld>
 </file>
 
-<file path=ppt/slides/slide15.xml><?xml version="1.0" encoding="utf-8"?>
+<file path=ppt/slides/slide16.xml><?xml version="1.0" encoding="utf-8"?>
 <p:sld xmlns:a="http://schemas.openxmlformats.org/drawingml/2006/main" xmlns:p="http://schemas.openxmlformats.org/presentationml/2006/main" xmlns:r="http://schemas.openxmlformats.org/officeDocument/2006/relationships">
   <p:cSld>
     <p:spTree>
@@ -12058,8 +13713,8 @@
         </p:nvSpPr>
         <p:spPr>
           <a:xfrm>
-            <a:off x="550000" y="1300000"/>
-            <a:ext cx="11100000" cy="894000"/>
+            <a:off x="550000" y="2255000"/>
+            <a:ext cx="11100000" cy="520000"/>
           </a:xfrm>
           <a:prstGeom prst="roundRect">
             <a:avLst>
@@ -12104,8 +13759,8 @@
         </p:nvSpPr>
         <p:spPr>
           <a:xfrm>
-            <a:off x="550000" y="1300000"/>
-            <a:ext cx="70000" cy="894000"/>
+            <a:off x="550000" y="2255000"/>
+            <a:ext cx="70000" cy="520000"/>
           </a:xfrm>
           <a:prstGeom prst="rect">
             <a:avLst/>
@@ -12148,8 +13803,8 @@
         </p:nvSpPr>
         <p:spPr>
           <a:xfrm>
-            <a:off x="800000" y="1517000"/>
-            <a:ext cx="460000" cy="460000"/>
+            <a:off x="780000" y="2325000"/>
+            <a:ext cx="380000" cy="380000"/>
           </a:xfrm>
           <a:prstGeom prst="ellipse">
             <a:avLst/>
@@ -12182,7 +13837,7 @@
           <a:p>
             <a:pPr algn="ctr"/>
             <a:r>
-              <a:rPr sz="1600" b="1">
+              <a:rPr sz="1400" b="1">
                 <a:solidFill>
                   <a:srgbClr val="FFFFFF"/>
                 </a:solidFill>
@@ -12201,8 +13856,8 @@
         </p:nvSpPr>
         <p:spPr>
           <a:xfrm>
-            <a:off x="1450000" y="1300000"/>
-            <a:ext cx="10050000" cy="894000"/>
+            <a:off x="1380000" y="2295000"/>
+            <a:ext cx="10150000" cy="440000"/>
           </a:xfrm>
           <a:prstGeom prst="rect">
             <a:avLst/>
@@ -12210,14 +13865,13 @@
           <a:noFill/>
         </p:spPr>
         <p:txBody>
-          <a:bodyPr wrap="square" anchor="ctr" lIns="50800" rIns="50800">
+          <a:bodyPr wrap="square" anchor="ctr">
             <a:spAutoFit/>
           </a:bodyPr>
           <a:lstStyle/>
           <a:p>
-            <a:pPr algn="l"/>
             <a:r>
-              <a:rPr sz="1900" b="0">
+              <a:rPr sz="1600" b="0">
                 <a:solidFill>
                   <a:srgbClr val="1B2430"/>
                 </a:solidFill>
@@ -12236,8 +13890,8 @@
         </p:nvSpPr>
         <p:spPr>
           <a:xfrm>
-            <a:off x="550000" y="2314000"/>
-            <a:ext cx="11100000" cy="894000"/>
+            <a:off x="550000" y="2885000"/>
+            <a:ext cx="11100000" cy="520000"/>
           </a:xfrm>
           <a:prstGeom prst="roundRect">
             <a:avLst>
@@ -12282,8 +13936,8 @@
         </p:nvSpPr>
         <p:spPr>
           <a:xfrm>
-            <a:off x="550000" y="2314000"/>
-            <a:ext cx="70000" cy="894000"/>
+            <a:off x="550000" y="2885000"/>
+            <a:ext cx="70000" cy="520000"/>
           </a:xfrm>
           <a:prstGeom prst="rect">
             <a:avLst/>
@@ -12326,8 +13980,8 @@
         </p:nvSpPr>
         <p:spPr>
           <a:xfrm>
-            <a:off x="800000" y="2531000"/>
-            <a:ext cx="460000" cy="460000"/>
+            <a:off x="780000" y="2955000"/>
+            <a:ext cx="380000" cy="380000"/>
           </a:xfrm>
           <a:prstGeom prst="ellipse">
             <a:avLst/>
@@ -12360,7 +14014,7 @@
           <a:p>
             <a:pPr algn="ctr"/>
             <a:r>
-              <a:rPr sz="1600" b="1">
+              <a:rPr sz="1400" b="1">
                 <a:solidFill>
                   <a:srgbClr val="FFFFFF"/>
                 </a:solidFill>
@@ -12379,8 +14033,8 @@
         </p:nvSpPr>
         <p:spPr>
           <a:xfrm>
-            <a:off x="1450000" y="2314000"/>
-            <a:ext cx="10050000" cy="894000"/>
+            <a:off x="1380000" y="2925000"/>
+            <a:ext cx="10150000" cy="440000"/>
           </a:xfrm>
           <a:prstGeom prst="rect">
             <a:avLst/>
@@ -12388,14 +14042,13 @@
           <a:noFill/>
         </p:spPr>
         <p:txBody>
-          <a:bodyPr wrap="square" anchor="ctr" lIns="50800" rIns="50800">
+          <a:bodyPr wrap="square" anchor="ctr">
             <a:spAutoFit/>
           </a:bodyPr>
           <a:lstStyle/>
           <a:p>
-            <a:pPr algn="l"/>
             <a:r>
-              <a:rPr sz="1900" b="0">
+              <a:rPr sz="1600" b="0">
                 <a:solidFill>
                   <a:srgbClr val="1B2430"/>
                 </a:solidFill>
@@ -12414,8 +14067,8 @@
         </p:nvSpPr>
         <p:spPr>
           <a:xfrm>
-            <a:off x="550000" y="3328000"/>
-            <a:ext cx="11100000" cy="894000"/>
+            <a:off x="550000" y="3515000"/>
+            <a:ext cx="11100000" cy="520000"/>
           </a:xfrm>
           <a:prstGeom prst="roundRect">
             <a:avLst>
@@ -12460,8 +14113,8 @@
         </p:nvSpPr>
         <p:spPr>
           <a:xfrm>
-            <a:off x="550000" y="3328000"/>
-            <a:ext cx="70000" cy="894000"/>
+            <a:off x="550000" y="3515000"/>
+            <a:ext cx="70000" cy="520000"/>
           </a:xfrm>
           <a:prstGeom prst="rect">
             <a:avLst/>
@@ -12504,8 +14157,8 @@
         </p:nvSpPr>
         <p:spPr>
           <a:xfrm>
-            <a:off x="800000" y="3545000"/>
-            <a:ext cx="460000" cy="460000"/>
+            <a:off x="780000" y="3585000"/>
+            <a:ext cx="380000" cy="380000"/>
           </a:xfrm>
           <a:prstGeom prst="ellipse">
             <a:avLst/>
@@ -12538,7 +14191,7 @@
           <a:p>
             <a:pPr algn="ctr"/>
             <a:r>
-              <a:rPr sz="1600" b="1">
+              <a:rPr sz="1400" b="1">
                 <a:solidFill>
                   <a:srgbClr val="FFFFFF"/>
                 </a:solidFill>
@@ -12557,8 +14210,8 @@
         </p:nvSpPr>
         <p:spPr>
           <a:xfrm>
-            <a:off x="1450000" y="3328000"/>
-            <a:ext cx="10050000" cy="894000"/>
+            <a:off x="1380000" y="3555000"/>
+            <a:ext cx="10150000" cy="440000"/>
           </a:xfrm>
           <a:prstGeom prst="rect">
             <a:avLst/>
@@ -12566,14 +14219,13 @@
           <a:noFill/>
         </p:spPr>
         <p:txBody>
-          <a:bodyPr wrap="square" anchor="ctr" lIns="50800" rIns="50800">
+          <a:bodyPr wrap="square" anchor="ctr">
             <a:spAutoFit/>
           </a:bodyPr>
           <a:lstStyle/>
           <a:p>
-            <a:pPr algn="l"/>
             <a:r>
-              <a:rPr sz="1900" b="0">
+              <a:rPr sz="1600" b="0">
                 <a:solidFill>
                   <a:srgbClr val="1B2430"/>
                 </a:solidFill>
@@ -12592,8 +14244,8 @@
         </p:nvSpPr>
         <p:spPr>
           <a:xfrm>
-            <a:off x="550000" y="4342000"/>
-            <a:ext cx="11100000" cy="894000"/>
+            <a:off x="550000" y="4145000"/>
+            <a:ext cx="11100000" cy="520000"/>
           </a:xfrm>
           <a:prstGeom prst="roundRect">
             <a:avLst>
@@ -12638,8 +14290,8 @@
         </p:nvSpPr>
         <p:spPr>
           <a:xfrm>
-            <a:off x="550000" y="4342000"/>
-            <a:ext cx="70000" cy="894000"/>
+            <a:off x="550000" y="4145000"/>
+            <a:ext cx="70000" cy="520000"/>
           </a:xfrm>
           <a:prstGeom prst="rect">
             <a:avLst/>
@@ -12682,8 +14334,8 @@
         </p:nvSpPr>
         <p:spPr>
           <a:xfrm>
-            <a:off x="800000" y="4559000"/>
-            <a:ext cx="460000" cy="460000"/>
+            <a:off x="780000" y="4215000"/>
+            <a:ext cx="380000" cy="380000"/>
           </a:xfrm>
           <a:prstGeom prst="ellipse">
             <a:avLst/>
@@ -12716,7 +14368,7 @@
           <a:p>
             <a:pPr algn="ctr"/>
             <a:r>
-              <a:rPr sz="1600" b="1">
+              <a:rPr sz="1400" b="1">
                 <a:solidFill>
                   <a:srgbClr val="FFFFFF"/>
                 </a:solidFill>
@@ -12735,8 +14387,8 @@
         </p:nvSpPr>
         <p:spPr>
           <a:xfrm>
-            <a:off x="1450000" y="4342000"/>
-            <a:ext cx="10050000" cy="894000"/>
+            <a:off x="1380000" y="4185000"/>
+            <a:ext cx="10150000" cy="440000"/>
           </a:xfrm>
           <a:prstGeom prst="rect">
             <a:avLst/>
@@ -12744,14 +14396,13 @@
           <a:noFill/>
         </p:spPr>
         <p:txBody>
-          <a:bodyPr wrap="square" anchor="ctr" lIns="50800" rIns="50800">
+          <a:bodyPr wrap="square" anchor="ctr">
             <a:spAutoFit/>
           </a:bodyPr>
           <a:lstStyle/>
           <a:p>
-            <a:pPr algn="l"/>
             <a:r>
-              <a:rPr sz="1900" b="0">
+              <a:rPr sz="1600" b="0">
                 <a:solidFill>
                   <a:srgbClr val="1B2430"/>
                 </a:solidFill>
@@ -12770,8 +14421,8 @@
         </p:nvSpPr>
         <p:spPr>
           <a:xfrm>
-            <a:off x="550000" y="5356000"/>
-            <a:ext cx="11100000" cy="894000"/>
+            <a:off x="550000" y="4775000"/>
+            <a:ext cx="11100000" cy="520000"/>
           </a:xfrm>
           <a:prstGeom prst="roundRect">
             <a:avLst>
@@ -12816,8 +14467,8 @@
         </p:nvSpPr>
         <p:spPr>
           <a:xfrm>
-            <a:off x="550000" y="5356000"/>
-            <a:ext cx="70000" cy="894000"/>
+            <a:off x="550000" y="4775000"/>
+            <a:ext cx="70000" cy="520000"/>
           </a:xfrm>
           <a:prstGeom prst="rect">
             <a:avLst/>
@@ -12860,8 +14511,8 @@
         </p:nvSpPr>
         <p:spPr>
           <a:xfrm>
-            <a:off x="800000" y="5573000"/>
-            <a:ext cx="460000" cy="460000"/>
+            <a:off x="780000" y="4845000"/>
+            <a:ext cx="380000" cy="380000"/>
           </a:xfrm>
           <a:prstGeom prst="ellipse">
             <a:avLst/>
@@ -12894,7 +14545,7 @@
           <a:p>
             <a:pPr algn="ctr"/>
             <a:r>
-              <a:rPr sz="1600" b="1">
+              <a:rPr sz="1400" b="1">
                 <a:solidFill>
                   <a:srgbClr val="FFFFFF"/>
                 </a:solidFill>
@@ -12913,8 +14564,8 @@
         </p:nvSpPr>
         <p:spPr>
           <a:xfrm>
-            <a:off x="1450000" y="5356000"/>
-            <a:ext cx="10050000" cy="894000"/>
+            <a:off x="1380000" y="4815000"/>
+            <a:ext cx="10150000" cy="440000"/>
           </a:xfrm>
           <a:prstGeom prst="rect">
             <a:avLst/>
@@ -12922,14 +14573,13 @@
           <a:noFill/>
         </p:spPr>
         <p:txBody>
-          <a:bodyPr wrap="square" anchor="ctr" lIns="50800" rIns="50800">
+          <a:bodyPr wrap="square" anchor="ctr">
             <a:spAutoFit/>
           </a:bodyPr>
           <a:lstStyle/>
           <a:p>
-            <a:pPr algn="l"/>
             <a:r>
-              <a:rPr sz="1900" b="0">
+              <a:rPr sz="1600" b="0">
                 <a:solidFill>
                   <a:srgbClr val="1B2430"/>
                 </a:solidFill>
@@ -16114,12 +17764,12 @@
         </p:nvSpPr>
         <p:spPr>
           <a:xfrm>
-            <a:off x="550000" y="1300000"/>
-            <a:ext cx="11100000" cy="1147500"/>
+            <a:off x="550000" y="1250000"/>
+            <a:ext cx="11100000" cy="1180000"/>
           </a:xfrm>
           <a:prstGeom prst="roundRect">
             <a:avLst>
-              <a:gd name="adj" fmla="val 18000"/>
+              <a:gd name="adj" fmla="val 8000"/>
             </a:avLst>
           </a:prstGeom>
           <a:solidFill>
@@ -16160,8 +17810,8 @@
         </p:nvSpPr>
         <p:spPr>
           <a:xfrm>
-            <a:off x="550000" y="1300000"/>
-            <a:ext cx="70000" cy="1147500"/>
+            <a:off x="550000" y="1250000"/>
+            <a:ext cx="70000" cy="1180000"/>
           </a:xfrm>
           <a:prstGeom prst="rect">
             <a:avLst/>
@@ -16204,8 +17854,8 @@
         </p:nvSpPr>
         <p:spPr>
           <a:xfrm>
-            <a:off x="800000" y="1643750"/>
-            <a:ext cx="460000" cy="460000"/>
+            <a:off x="780000" y="1630000"/>
+            <a:ext cx="420000" cy="420000"/>
           </a:xfrm>
           <a:prstGeom prst="ellipse">
             <a:avLst/>
@@ -16238,7 +17888,7 @@
           <a:p>
             <a:pPr algn="ctr"/>
             <a:r>
-              <a:rPr sz="1600" b="1">
+              <a:rPr sz="1400" b="1">
                 <a:solidFill>
                   <a:srgbClr val="FFFFFF"/>
                 </a:solidFill>
@@ -16257,8 +17907,8 @@
         </p:nvSpPr>
         <p:spPr>
           <a:xfrm>
-            <a:off x="1450000" y="1300000"/>
-            <a:ext cx="10050000" cy="1147500"/>
+            <a:off x="1380000" y="1290000"/>
+            <a:ext cx="10150000" cy="1100000"/>
           </a:xfrm>
           <a:prstGeom prst="rect">
             <a:avLst/>
@@ -16266,22 +17916,37 @@
           <a:noFill/>
         </p:spPr>
         <p:txBody>
-          <a:bodyPr wrap="square" anchor="ctr" lIns="50800" rIns="50800">
+          <a:bodyPr wrap="square" anchor="ctr">
             <a:spAutoFit/>
           </a:bodyPr>
           <a:lstStyle/>
           <a:p>
-            <a:pPr algn="l"/>
             <a:r>
-              <a:rPr sz="1400" b="0">
+              <a:rPr sz="1500" b="1">
                 <a:solidFill>
-                  <a:srgbClr val="1B2430"/>
+                  <a:srgbClr val="1F3A5F"/>
                 </a:solidFill>
                 <a:latin typeface="Calibri"/>
               </a:rPr>
               <a:t>SI etikasi bo'yicha hujjatlarni uch darajaga ajratish foydali: tamoyillar (nima qilish kerak), standartlar (qanday tashkil qilish kerak) va qonunlar (nima majburiy).</a:t>
             </a:r>
           </a:p>
+          <a:p>
+            <a:pPr>
+              <a:spcBef>
+                <a:spcPts val="400"/>
+              </a:spcBef>
+            </a:pPr>
+            <a:r>
+              <a:rPr sz="1400">
+                <a:solidFill>
+                  <a:srgbClr val="334055"/>
+                </a:solidFill>
+                <a:latin typeface="Calibri"/>
+              </a:rPr>
+              <a:t>Tamoyillar darajasida eng ta'sirlilari — OECD SI tamoyillari (2019, 2024-yilda yangilangan; 47 dan ortiq davlat qo'shilgan) va UNESCO ning SI etikasi bo'yicha tavsiyasi (2021, 193 a'zo davlat tomonidan qabul qilingan).</a:t>
+            </a:r>
+          </a:p>
         </p:txBody>
       </p:sp>
       <p:sp>
@@ -16292,12 +17957,12 @@
         </p:nvSpPr>
         <p:spPr>
           <a:xfrm>
-            <a:off x="550000" y="2567500"/>
-            <a:ext cx="11100000" cy="1147500"/>
+            <a:off x="550000" y="2540000"/>
+            <a:ext cx="11100000" cy="1180000"/>
           </a:xfrm>
           <a:prstGeom prst="roundRect">
             <a:avLst>
-              <a:gd name="adj" fmla="val 18000"/>
+              <a:gd name="adj" fmla="val 8000"/>
             </a:avLst>
           </a:prstGeom>
           <a:solidFill>
@@ -16338,8 +18003,8 @@
         </p:nvSpPr>
         <p:spPr>
           <a:xfrm>
-            <a:off x="550000" y="2567500"/>
-            <a:ext cx="70000" cy="1147500"/>
+            <a:off x="550000" y="2540000"/>
+            <a:ext cx="70000" cy="1180000"/>
           </a:xfrm>
           <a:prstGeom prst="rect">
             <a:avLst/>
@@ -16382,8 +18047,8 @@
         </p:nvSpPr>
         <p:spPr>
           <a:xfrm>
-            <a:off x="800000" y="2911250"/>
-            <a:ext cx="460000" cy="460000"/>
+            <a:off x="780000" y="2920000"/>
+            <a:ext cx="420000" cy="420000"/>
           </a:xfrm>
           <a:prstGeom prst="ellipse">
             <a:avLst/>
@@ -16416,7 +18081,7 @@
           <a:p>
             <a:pPr algn="ctr"/>
             <a:r>
-              <a:rPr sz="1600" b="1">
+              <a:rPr sz="1400" b="1">
                 <a:solidFill>
                   <a:srgbClr val="FFFFFF"/>
                 </a:solidFill>
@@ -16435,8 +18100,8 @@
         </p:nvSpPr>
         <p:spPr>
           <a:xfrm>
-            <a:off x="1450000" y="2567500"/>
-            <a:ext cx="10050000" cy="1147500"/>
+            <a:off x="1380000" y="2580000"/>
+            <a:ext cx="10150000" cy="1100000"/>
           </a:xfrm>
           <a:prstGeom prst="rect">
             <a:avLst/>
@@ -16444,12 +18109,11 @@
           <a:noFill/>
         </p:spPr>
         <p:txBody>
-          <a:bodyPr wrap="square" anchor="ctr" lIns="50800" rIns="50800">
+          <a:bodyPr wrap="square" anchor="ctr">
             <a:spAutoFit/>
           </a:bodyPr>
           <a:lstStyle/>
           <a:p>
-            <a:pPr algn="l"/>
             <a:r>
               <a:rPr sz="1400" b="0">
                 <a:solidFill>
@@ -16470,12 +18134,12 @@
         </p:nvSpPr>
         <p:spPr>
           <a:xfrm>
-            <a:off x="550000" y="3835000"/>
-            <a:ext cx="11100000" cy="1147500"/>
+            <a:off x="550000" y="3830000"/>
+            <a:ext cx="11100000" cy="1180000"/>
           </a:xfrm>
           <a:prstGeom prst="roundRect">
             <a:avLst>
-              <a:gd name="adj" fmla="val 18000"/>
+              <a:gd name="adj" fmla="val 8000"/>
             </a:avLst>
           </a:prstGeom>
           <a:solidFill>
@@ -16516,8 +18180,8 @@
         </p:nvSpPr>
         <p:spPr>
           <a:xfrm>
-            <a:off x="550000" y="3835000"/>
-            <a:ext cx="70000" cy="1147500"/>
+            <a:off x="550000" y="3830000"/>
+            <a:ext cx="70000" cy="1180000"/>
           </a:xfrm>
           <a:prstGeom prst="rect">
             <a:avLst/>
@@ -16560,8 +18224,8 @@
         </p:nvSpPr>
         <p:spPr>
           <a:xfrm>
-            <a:off x="800000" y="4178750"/>
-            <a:ext cx="460000" cy="460000"/>
+            <a:off x="780000" y="4210000"/>
+            <a:ext cx="420000" cy="420000"/>
           </a:xfrm>
           <a:prstGeom prst="ellipse">
             <a:avLst/>
@@ -16594,7 +18258,7 @@
           <a:p>
             <a:pPr algn="ctr"/>
             <a:r>
-              <a:rPr sz="1600" b="1">
+              <a:rPr sz="1400" b="1">
                 <a:solidFill>
                   <a:srgbClr val="FFFFFF"/>
                 </a:solidFill>
@@ -16613,8 +18277,8 @@
         </p:nvSpPr>
         <p:spPr>
           <a:xfrm>
-            <a:off x="1450000" y="3835000"/>
-            <a:ext cx="10050000" cy="1147500"/>
+            <a:off x="1380000" y="3870000"/>
+            <a:ext cx="10150000" cy="1100000"/>
           </a:xfrm>
           <a:prstGeom prst="rect">
             <a:avLst/>
@@ -16622,12 +18286,11 @@
           <a:noFill/>
         </p:spPr>
         <p:txBody>
-          <a:bodyPr wrap="square" anchor="ctr" lIns="50800" rIns="50800">
+          <a:bodyPr wrap="square" anchor="ctr">
             <a:spAutoFit/>
           </a:bodyPr>
           <a:lstStyle/>
           <a:p>
-            <a:pPr algn="l"/>
             <a:r>
               <a:rPr sz="1400" b="0">
                 <a:solidFill>
@@ -16635,7 +18298,7 @@
                 </a:solidFill>
                 <a:latin typeface="Calibri"/>
               </a:rPr>
-              <a:t>ISO/IEC 42001 alohida e'tiborga loyiq, chunki u ISO 9001 (sifat) va ISO/IEC 27001 (axborot xavfsizligi) kabi «boshqaruv tizimi» standartidir: u modelning o'zini emas, balki tashkilotning SI…</a:t>
+              <a:t>ISO/IEC 42001 alohida e'tiborga loyiq, chunki u ISO 9001 (sifat) va ISO/IEC 27001 (axborot xavfsizligi) kabi «boshqaruv tizimi» standartidir: u modelning o'zini emas, balki tashkilotning SI ni ishlab chiqish va qo'llash jarayonini sertifikatlaydi.</a:t>
             </a:r>
           </a:p>
         </p:txBody>
@@ -16648,12 +18311,12 @@
         </p:nvSpPr>
         <p:spPr>
           <a:xfrm>
-            <a:off x="550000" y="5102500"/>
-            <a:ext cx="11100000" cy="1147500"/>
+            <a:off x="550000" y="5120000"/>
+            <a:ext cx="11100000" cy="1180000"/>
           </a:xfrm>
           <a:prstGeom prst="roundRect">
             <a:avLst>
-              <a:gd name="adj" fmla="val 18000"/>
+              <a:gd name="adj" fmla="val 8000"/>
             </a:avLst>
           </a:prstGeom>
           <a:solidFill>
@@ -16694,8 +18357,8 @@
         </p:nvSpPr>
         <p:spPr>
           <a:xfrm>
-            <a:off x="550000" y="5102500"/>
-            <a:ext cx="70000" cy="1147500"/>
+            <a:off x="550000" y="5120000"/>
+            <a:ext cx="70000" cy="1180000"/>
           </a:xfrm>
           <a:prstGeom prst="rect">
             <a:avLst/>
@@ -16738,8 +18401,8 @@
         </p:nvSpPr>
         <p:spPr>
           <a:xfrm>
-            <a:off x="800000" y="5446250"/>
-            <a:ext cx="460000" cy="460000"/>
+            <a:off x="780000" y="5500000"/>
+            <a:ext cx="420000" cy="420000"/>
           </a:xfrm>
           <a:prstGeom prst="ellipse">
             <a:avLst/>
@@ -16772,7 +18435,7 @@
           <a:p>
             <a:pPr algn="ctr"/>
             <a:r>
-              <a:rPr sz="1600" b="1">
+              <a:rPr sz="1400" b="1">
                 <a:solidFill>
                   <a:srgbClr val="FFFFFF"/>
                 </a:solidFill>
@@ -16791,8 +18454,8 @@
         </p:nvSpPr>
         <p:spPr>
           <a:xfrm>
-            <a:off x="1450000" y="5102500"/>
-            <a:ext cx="10050000" cy="1147500"/>
+            <a:off x="1380000" y="5160000"/>
+            <a:ext cx="10150000" cy="1100000"/>
           </a:xfrm>
           <a:prstGeom prst="rect">
             <a:avLst/>
@@ -16800,12 +18463,11 @@
           <a:noFill/>
         </p:spPr>
         <p:txBody>
-          <a:bodyPr wrap="square" anchor="ctr" lIns="50800" rIns="50800">
+          <a:bodyPr wrap="square" anchor="ctr">
             <a:spAutoFit/>
           </a:bodyPr>
           <a:lstStyle/>
           <a:p>
-            <a:pPr algn="l"/>
             <a:r>
               <a:rPr sz="1400" b="0">
                 <a:solidFill>
@@ -16813,7 +18475,7 @@
                 </a:solidFill>
                 <a:latin typeface="Calibri"/>
               </a:rPr>
-              <a:t>Qonunlar darajasida EU AI Act xavfga asoslangan yondashuvni qo'llaydi: taqiqlangan amaliyotlar (ijtimoiy reyting, ish joyida his-tuyg'ularni tanish, nozik belgilarga ko'ra biometrik…</a:t>
+              <a:t>Qonunlar darajasida EU AI Act xavfga asoslangan yondashuvni qo'llaydi: taqiqlangan amaliyotlar (ijtimoiy reyting, ish joyida his-tuyg'ularni tanish, nozik belgilarga ko'ra biometrik tasniflash — 2025-yil fevralidan taqiqlangan), yuqori xavfli tizimlar (Annex…</a:t>
             </a:r>
           </a:p>
         </p:txBody>
@@ -20854,12 +22516,12 @@
         </p:nvSpPr>
         <p:spPr>
           <a:xfrm>
-            <a:off x="550000" y="1620000"/>
-            <a:ext cx="11100000" cy="1250000"/>
+            <a:off x="550000" y="1409780"/>
+            <a:ext cx="11100000" cy="1503480"/>
           </a:xfrm>
           <a:prstGeom prst="roundRect">
             <a:avLst>
-              <a:gd name="adj" fmla="val 18000"/>
+              <a:gd name="adj" fmla="val 8000"/>
             </a:avLst>
           </a:prstGeom>
           <a:solidFill>
@@ -20900,8 +22562,8 @@
         </p:nvSpPr>
         <p:spPr>
           <a:xfrm>
-            <a:off x="550000" y="1620000"/>
-            <a:ext cx="70000" cy="1250000"/>
+            <a:off x="550000" y="1409780"/>
+            <a:ext cx="70000" cy="1503480"/>
           </a:xfrm>
           <a:prstGeom prst="rect">
             <a:avLst/>
@@ -20944,8 +22606,8 @@
         </p:nvSpPr>
         <p:spPr>
           <a:xfrm>
-            <a:off x="800000" y="2015000"/>
-            <a:ext cx="460000" cy="460000"/>
+            <a:off x="780000" y="1951520"/>
+            <a:ext cx="420000" cy="420000"/>
           </a:xfrm>
           <a:prstGeom prst="ellipse">
             <a:avLst/>
@@ -20978,7 +22640,7 @@
           <a:p>
             <a:pPr algn="ctr"/>
             <a:r>
-              <a:rPr sz="1600" b="1">
+              <a:rPr sz="1400" b="1">
                 <a:solidFill>
                   <a:srgbClr val="FFFFFF"/>
                 </a:solidFill>
@@ -20997,8 +22659,8 @@
         </p:nvSpPr>
         <p:spPr>
           <a:xfrm>
-            <a:off x="1450000" y="1620000"/>
-            <a:ext cx="10050000" cy="1250000"/>
+            <a:off x="1380000" y="1449780"/>
+            <a:ext cx="10150000" cy="1423480"/>
           </a:xfrm>
           <a:prstGeom prst="rect">
             <a:avLst/>
@@ -21006,20 +22668,35 @@
           <a:noFill/>
         </p:spPr>
         <p:txBody>
-          <a:bodyPr wrap="square" anchor="ctr" lIns="50800" rIns="50800">
+          <a:bodyPr wrap="square" anchor="ctr">
             <a:spAutoFit/>
           </a:bodyPr>
           <a:lstStyle/>
           <a:p>
-            <a:pPr algn="l"/>
             <a:r>
-              <a:rPr sz="1600" b="0">
+              <a:rPr sz="1500" b="1">
                 <a:solidFill>
-                  <a:srgbClr val="1B2430"/>
+                  <a:srgbClr val="1F3A5F"/>
                 </a:solidFill>
                 <a:latin typeface="Calibri"/>
               </a:rPr>
-              <a:t>Mas'uliyatli SI — bu tamoyillarni butun hayot sikli bo'ylab amalga oshiruvchi muhandislik va tashkiliy amaliyotlar to'plami. Uning yadrosi — SI tizimi texnik artefakt emas, balki ijtimoiy-texnik tizim (sociotechnical system) ekanini tan olish: model,…</a:t>
+              <a:t>Mas'uliyatli SI — bu tamoyillarni butun hayot sikli bo'ylab amalga oshiruvchi muhandislik va tashkiliy amaliyotlar to'plami.</a:t>
+            </a:r>
+          </a:p>
+          <a:p>
+            <a:pPr>
+              <a:spcBef>
+                <a:spcPts val="400"/>
+              </a:spcBef>
+            </a:pPr>
+            <a:r>
+              <a:rPr sz="1400">
+                <a:solidFill>
+                  <a:srgbClr val="334055"/>
+                </a:solidFill>
+                <a:latin typeface="Calibri"/>
+              </a:rPr>
+              <a:t>Uning yadrosi — SI tizimi texnik artefakt emas, balki ijtimoiy-texnik tizim (sociotechnical system) ekanini tan olish: model, ma'lumot, foydalanuvchi, operator, ta'sirlanuvchi shaxslar va tashkiliy jarayonlar birgalikda natijani belgilaydi.</a:t>
             </a:r>
           </a:p>
         </p:txBody>
@@ -21032,12 +22709,12 @@
         </p:nvSpPr>
         <p:spPr>
           <a:xfrm>
-            <a:off x="550000" y="2990000"/>
-            <a:ext cx="11100000" cy="1250000"/>
+            <a:off x="550000" y="3023260"/>
+            <a:ext cx="11100000" cy="1503480"/>
           </a:xfrm>
           <a:prstGeom prst="roundRect">
             <a:avLst>
-              <a:gd name="adj" fmla="val 18000"/>
+              <a:gd name="adj" fmla="val 8000"/>
             </a:avLst>
           </a:prstGeom>
           <a:solidFill>
@@ -21078,8 +22755,8 @@
         </p:nvSpPr>
         <p:spPr>
           <a:xfrm>
-            <a:off x="550000" y="2990000"/>
-            <a:ext cx="70000" cy="1250000"/>
+            <a:off x="550000" y="3023260"/>
+            <a:ext cx="70000" cy="1503480"/>
           </a:xfrm>
           <a:prstGeom prst="rect">
             <a:avLst/>
@@ -21122,8 +22799,8 @@
         </p:nvSpPr>
         <p:spPr>
           <a:xfrm>
-            <a:off x="800000" y="3385000"/>
-            <a:ext cx="460000" cy="460000"/>
+            <a:off x="780000" y="3565000"/>
+            <a:ext cx="420000" cy="420000"/>
           </a:xfrm>
           <a:prstGeom prst="ellipse">
             <a:avLst/>
@@ -21156,7 +22833,7 @@
           <a:p>
             <a:pPr algn="ctr"/>
             <a:r>
-              <a:rPr sz="1600" b="1">
+              <a:rPr sz="1400" b="1">
                 <a:solidFill>
                   <a:srgbClr val="FFFFFF"/>
                 </a:solidFill>
@@ -21175,8 +22852,8 @@
         </p:nvSpPr>
         <p:spPr>
           <a:xfrm>
-            <a:off x="1450000" y="2990000"/>
-            <a:ext cx="10050000" cy="1250000"/>
+            <a:off x="1380000" y="3063260"/>
+            <a:ext cx="10150000" cy="1423480"/>
           </a:xfrm>
           <a:prstGeom prst="rect">
             <a:avLst/>
@@ -21184,20 +22861,35 @@
           <a:noFill/>
         </p:spPr>
         <p:txBody>
-          <a:bodyPr wrap="square" anchor="ctr" lIns="50800" rIns="50800">
+          <a:bodyPr wrap="square" anchor="ctr">
             <a:spAutoFit/>
           </a:bodyPr>
           <a:lstStyle/>
           <a:p>
-            <a:pPr algn="l"/>
             <a:r>
-              <a:rPr sz="1600" b="0">
+              <a:rPr sz="1500" b="1">
                 <a:solidFill>
-                  <a:srgbClr val="1B2430"/>
+                  <a:srgbClr val="1F3A5F"/>
                 </a:solidFill>
                 <a:latin typeface="Calibri"/>
               </a:rPr>
-              <a:t>Amaliyotda Responsible AI quyidagi artefaktlar orqali moddiylashadi. Model kartasi (Model Card, Mitchell va boshq., 2019) — modelning maqsadi, o'qitish ma'lumoti, baholash natijalari (guruhlar kesimida), cheklovlar va etik mulohazalar haqida…</a:t>
+              <a:t>Amaliyotda Responsible AI quyidagi artefaktlar orqali moddiylashadi.</a:t>
+            </a:r>
+          </a:p>
+          <a:p>
+            <a:pPr>
+              <a:spcBef>
+                <a:spcPts val="400"/>
+              </a:spcBef>
+            </a:pPr>
+            <a:r>
+              <a:rPr sz="1400">
+                <a:solidFill>
+                  <a:srgbClr val="334055"/>
+                </a:solidFill>
+                <a:latin typeface="Calibri"/>
+              </a:rPr>
+              <a:t>Model kartasi (Model Card, Mitchell va boshq., 2019) — modelning maqsadi, o'qitish ma'lumoti, baholash natijalari (guruhlar kesimida), cheklovlar va etik mulohazalar haqida standartlashtirilgan hujjat.</a:t>
             </a:r>
           </a:p>
         </p:txBody>
@@ -21210,12 +22902,12 @@
         </p:nvSpPr>
         <p:spPr>
           <a:xfrm>
-            <a:off x="550000" y="4360000"/>
-            <a:ext cx="11100000" cy="1250000"/>
+            <a:off x="550000" y="4636740"/>
+            <a:ext cx="11100000" cy="1503480"/>
           </a:xfrm>
           <a:prstGeom prst="roundRect">
             <a:avLst>
-              <a:gd name="adj" fmla="val 18000"/>
+              <a:gd name="adj" fmla="val 8000"/>
             </a:avLst>
           </a:prstGeom>
           <a:solidFill>
@@ -21256,8 +22948,8 @@
         </p:nvSpPr>
         <p:spPr>
           <a:xfrm>
-            <a:off x="550000" y="4360000"/>
-            <a:ext cx="70000" cy="1250000"/>
+            <a:off x="550000" y="4636740"/>
+            <a:ext cx="70000" cy="1503480"/>
           </a:xfrm>
           <a:prstGeom prst="rect">
             <a:avLst/>
@@ -21300,8 +22992,8 @@
         </p:nvSpPr>
         <p:spPr>
           <a:xfrm>
-            <a:off x="800000" y="4755000"/>
-            <a:ext cx="460000" cy="460000"/>
+            <a:off x="780000" y="5178480"/>
+            <a:ext cx="420000" cy="420000"/>
           </a:xfrm>
           <a:prstGeom prst="ellipse">
             <a:avLst/>
@@ -21334,7 +23026,7 @@
           <a:p>
             <a:pPr algn="ctr"/>
             <a:r>
-              <a:rPr sz="1600" b="1">
+              <a:rPr sz="1400" b="1">
                 <a:solidFill>
                   <a:srgbClr val="FFFFFF"/>
                 </a:solidFill>
@@ -21353,8 +23045,8 @@
         </p:nvSpPr>
         <p:spPr>
           <a:xfrm>
-            <a:off x="1450000" y="4360000"/>
-            <a:ext cx="10050000" cy="1250000"/>
+            <a:off x="1380000" y="4676740"/>
+            <a:ext cx="10150000" cy="1423480"/>
           </a:xfrm>
           <a:prstGeom prst="rect">
             <a:avLst/>
@@ -21362,20 +23054,35 @@
           <a:noFill/>
         </p:spPr>
         <p:txBody>
-          <a:bodyPr wrap="square" anchor="ctr" lIns="50800" rIns="50800">
+          <a:bodyPr wrap="square" anchor="ctr">
             <a:spAutoFit/>
           </a:bodyPr>
           <a:lstStyle/>
           <a:p>
-            <a:pPr algn="l"/>
             <a:r>
-              <a:rPr sz="1600" b="0">
+              <a:rPr sz="1500" b="1">
                 <a:solidFill>
-                  <a:srgbClr val="1B2430"/>
+                  <a:srgbClr val="1F3A5F"/>
                 </a:solidFill>
                 <a:latin typeface="Calibri"/>
               </a:rPr>
-              <a:t>Muhim nuqta: mas'uliyatli SI tizimning har bir bosqichida qaror nuqtalarini o'z ichiga oladi. Muammo qo'yilishida — «bu masalani SI bilan yechish to'g'rimi» (ba'zan eng mas'uliyatli qaror — tizimni qurmaslik).</a:t>
+              <a:t>Muhim nuqta: mas'uliyatli SI tizimning har bir bosqichida qaror nuqtalarini o'z ichiga oladi.</a:t>
+            </a:r>
+          </a:p>
+          <a:p>
+            <a:pPr>
+              <a:spcBef>
+                <a:spcPts val="400"/>
+              </a:spcBef>
+            </a:pPr>
+            <a:r>
+              <a:rPr sz="1400">
+                <a:solidFill>
+                  <a:srgbClr val="334055"/>
+                </a:solidFill>
+                <a:latin typeface="Calibri"/>
+              </a:rPr>
+              <a:t>Muammo qo'yilishida — «bu masalani SI bilan yechish to'g'rimi» (ba'zan eng mas'uliyatli qaror — tizimni qurmaslik). Ma'lumot yig'ishda — vakillik (representativeness), rozilik, tarixiy noxolislik. Modellashtirishda — maqsad funksiyasi kimning manfaatini optimallashtiradi.</a:t>
             </a:r>
           </a:p>
         </p:txBody>
@@ -23826,12 +25533,12 @@
         </p:nvSpPr>
         <p:spPr>
           <a:xfrm>
-            <a:off x="550000" y="1300000"/>
-            <a:ext cx="11100000" cy="894000"/>
+            <a:off x="550000" y="1409780"/>
+            <a:ext cx="11100000" cy="1503480"/>
           </a:xfrm>
           <a:prstGeom prst="roundRect">
             <a:avLst>
-              <a:gd name="adj" fmla="val 18000"/>
+              <a:gd name="adj" fmla="val 8000"/>
             </a:avLst>
           </a:prstGeom>
           <a:solidFill>
@@ -23872,8 +25579,8 @@
         </p:nvSpPr>
         <p:spPr>
           <a:xfrm>
-            <a:off x="550000" y="1300000"/>
-            <a:ext cx="70000" cy="894000"/>
+            <a:off x="550000" y="1409780"/>
+            <a:ext cx="70000" cy="1503480"/>
           </a:xfrm>
           <a:prstGeom prst="rect">
             <a:avLst/>
@@ -23916,8 +25623,8 @@
         </p:nvSpPr>
         <p:spPr>
           <a:xfrm>
-            <a:off x="800000" y="1517000"/>
-            <a:ext cx="460000" cy="460000"/>
+            <a:off x="780000" y="1951520"/>
+            <a:ext cx="420000" cy="420000"/>
           </a:xfrm>
           <a:prstGeom prst="ellipse">
             <a:avLst/>
@@ -23950,7 +25657,7 @@
           <a:p>
             <a:pPr algn="ctr"/>
             <a:r>
-              <a:rPr sz="1600" b="1">
+              <a:rPr sz="1400" b="1">
                 <a:solidFill>
                   <a:srgbClr val="FFFFFF"/>
                 </a:solidFill>
@@ -23969,8 +25676,8 @@
         </p:nvSpPr>
         <p:spPr>
           <a:xfrm>
-            <a:off x="1450000" y="1300000"/>
-            <a:ext cx="10050000" cy="894000"/>
+            <a:off x="1380000" y="1449780"/>
+            <a:ext cx="10150000" cy="1423480"/>
           </a:xfrm>
           <a:prstGeom prst="rect">
             <a:avLst/>
@@ -23978,22 +25685,37 @@
           <a:noFill/>
         </p:spPr>
         <p:txBody>
-          <a:bodyPr wrap="square" anchor="ctr" lIns="50800" rIns="50800">
+          <a:bodyPr wrap="square" anchor="ctr">
             <a:spAutoFit/>
           </a:bodyPr>
           <a:lstStyle/>
           <a:p>
-            <a:pPr algn="l"/>
             <a:r>
-              <a:rPr sz="1400" b="0">
+              <a:rPr sz="1500" b="1">
                 <a:solidFill>
-                  <a:srgbClr val="1B2430"/>
+                  <a:srgbClr val="1F3A5F"/>
                 </a:solidFill>
                 <a:latin typeface="Calibri"/>
               </a:rPr>
               <a:t>Adolatlilikning yagona ta'rifi yo'q — va bu matematik fakt, texnik kamchilik emas.</a:t>
             </a:r>
           </a:p>
+          <a:p>
+            <a:pPr>
+              <a:spcBef>
+                <a:spcPts val="400"/>
+              </a:spcBef>
+            </a:pPr>
+            <a:r>
+              <a:rPr sz="1400">
+                <a:solidFill>
+                  <a:srgbClr val="334055"/>
+                </a:solidFill>
+                <a:latin typeface="Calibri"/>
+              </a:rPr>
+              <a:t>Ikkilik tasniflash uchun asosiy guruh metrikalari quyidagilar (bu yerda Y — haqiqiy yorliq, Ŷ — bashorat, A — himoyalangan belgi, masalan jins yoki yosh guruhi):</a:t>
+            </a:r>
+          </a:p>
         </p:txBody>
       </p:sp>
       <p:sp>
@@ -24004,12 +25726,12 @@
         </p:nvSpPr>
         <p:spPr>
           <a:xfrm>
-            <a:off x="550000" y="2314000"/>
-            <a:ext cx="11100000" cy="894000"/>
+            <a:off x="550000" y="3023260"/>
+            <a:ext cx="11100000" cy="1503480"/>
           </a:xfrm>
           <a:prstGeom prst="roundRect">
             <a:avLst>
-              <a:gd name="adj" fmla="val 18000"/>
+              <a:gd name="adj" fmla="val 8000"/>
             </a:avLst>
           </a:prstGeom>
           <a:solidFill>
@@ -24050,8 +25772,8 @@
         </p:nvSpPr>
         <p:spPr>
           <a:xfrm>
-            <a:off x="550000" y="2314000"/>
-            <a:ext cx="70000" cy="894000"/>
+            <a:off x="550000" y="3023260"/>
+            <a:ext cx="70000" cy="1503480"/>
           </a:xfrm>
           <a:prstGeom prst="rect">
             <a:avLst/>
@@ -24094,8 +25816,8 @@
         </p:nvSpPr>
         <p:spPr>
           <a:xfrm>
-            <a:off x="800000" y="2531000"/>
-            <a:ext cx="460000" cy="460000"/>
+            <a:off x="780000" y="3565000"/>
+            <a:ext cx="420000" cy="420000"/>
           </a:xfrm>
           <a:prstGeom prst="ellipse">
             <a:avLst/>
@@ -24128,7 +25850,7 @@
           <a:p>
             <a:pPr algn="ctr"/>
             <a:r>
-              <a:rPr sz="1600" b="1">
+              <a:rPr sz="1400" b="1">
                 <a:solidFill>
                   <a:srgbClr val="FFFFFF"/>
                 </a:solidFill>
@@ -24147,8 +25869,8 @@
         </p:nvSpPr>
         <p:spPr>
           <a:xfrm>
-            <a:off x="1450000" y="2314000"/>
-            <a:ext cx="10050000" cy="894000"/>
+            <a:off x="1380000" y="3063260"/>
+            <a:ext cx="10150000" cy="1423480"/>
           </a:xfrm>
           <a:prstGeom prst="rect">
             <a:avLst/>
@@ -24156,22 +25878,37 @@
           <a:noFill/>
         </p:spPr>
         <p:txBody>
-          <a:bodyPr wrap="square" anchor="ctr" lIns="50800" rIns="50800">
+          <a:bodyPr wrap="square" anchor="ctr">
             <a:spAutoFit/>
           </a:bodyPr>
           <a:lstStyle/>
           <a:p>
-            <a:pPr algn="l"/>
             <a:r>
-              <a:rPr sz="1400" b="0">
+              <a:rPr sz="1500" b="1">
                 <a:solidFill>
-                  <a:srgbClr val="1B2430"/>
+                  <a:srgbClr val="1F3A5F"/>
                 </a:solidFill>
                 <a:latin typeface="Calibri"/>
               </a:rPr>
               <a:t>Metrikalar odatda farq (difference, ideal 0) yoki nisbat (ratio, ideal 1) ko'rinishida hisoblanadi.</a:t>
             </a:r>
           </a:p>
+          <a:p>
+            <a:pPr>
+              <a:spcBef>
+                <a:spcPts val="400"/>
+              </a:spcBef>
+            </a:pPr>
+            <a:r>
+              <a:rPr sz="1400">
+                <a:solidFill>
+                  <a:srgbClr val="334055"/>
+                </a:solidFill>
+                <a:latin typeface="Calibri"/>
+              </a:rPr>
+              <a:t>AQSh bandlik amaliyotidan kelgan «to'rtdan besh qoidasi» (four-fifths rule) ga ko'ra, ijobiy qaror ulushlari nisbati 0,8 dan past bo'lsa, bu nomutanosib ta'sir (disparate impact) belgisi hisoblanadi — ko'p auditlarda shu chegara qo'llaniladi.</a:t>
+            </a:r>
+          </a:p>
         </p:txBody>
       </p:sp>
       <p:sp>
@@ -24182,12 +25919,12 @@
         </p:nvSpPr>
         <p:spPr>
           <a:xfrm>
-            <a:off x="550000" y="3328000"/>
-            <a:ext cx="11100000" cy="894000"/>
+            <a:off x="550000" y="4636740"/>
+            <a:ext cx="11100000" cy="1503480"/>
           </a:xfrm>
           <a:prstGeom prst="roundRect">
             <a:avLst>
-              <a:gd name="adj" fmla="val 18000"/>
+              <a:gd name="adj" fmla="val 8000"/>
             </a:avLst>
           </a:prstGeom>
           <a:solidFill>
@@ -24228,8 +25965,8 @@
         </p:nvSpPr>
         <p:spPr>
           <a:xfrm>
-            <a:off x="550000" y="3328000"/>
-            <a:ext cx="70000" cy="894000"/>
+            <a:off x="550000" y="4636740"/>
+            <a:ext cx="70000" cy="1503480"/>
           </a:xfrm>
           <a:prstGeom prst="rect">
             <a:avLst/>
@@ -24272,8 +26009,8 @@
         </p:nvSpPr>
         <p:spPr>
           <a:xfrm>
-            <a:off x="800000" y="3545000"/>
-            <a:ext cx="460000" cy="460000"/>
+            <a:off x="780000" y="5178480"/>
+            <a:ext cx="420000" cy="420000"/>
           </a:xfrm>
           <a:prstGeom prst="ellipse">
             <a:avLst/>
@@ -24306,7 +26043,7 @@
           <a:p>
             <a:pPr algn="ctr"/>
             <a:r>
-              <a:rPr sz="1600" b="1">
+              <a:rPr sz="1400" b="1">
                 <a:solidFill>
                   <a:srgbClr val="FFFFFF"/>
                 </a:solidFill>
@@ -24325,8 +26062,8 @@
         </p:nvSpPr>
         <p:spPr>
           <a:xfrm>
-            <a:off x="1450000" y="3328000"/>
-            <a:ext cx="10050000" cy="894000"/>
+            <a:off x="1380000" y="4676740"/>
+            <a:ext cx="10150000" cy="1423480"/>
           </a:xfrm>
           <a:prstGeom prst="rect">
             <a:avLst/>
@@ -24334,376 +26071,35 @@
           <a:noFill/>
         </p:spPr>
         <p:txBody>
-          <a:bodyPr wrap="square" anchor="ctr" lIns="50800" rIns="50800">
+          <a:bodyPr wrap="square" anchor="ctr">
             <a:spAutoFit/>
           </a:bodyPr>
           <a:lstStyle/>
           <a:p>
-            <a:pPr algn="l"/>
             <a:r>
-              <a:rPr sz="1400" b="0">
+              <a:rPr sz="1500" b="1">
                 <a:solidFill>
-                  <a:srgbClr val="1B2430"/>
+                  <a:srgbClr val="1F3A5F"/>
                 </a:solidFill>
                 <a:latin typeface="Calibri"/>
               </a:rPr>
-              <a:t>Imkonsizlik teoremasi (Chouldechova, 2017; Kleinberg va boshq., 2016) shuni aytadiki, guruhlarda asosiy chastota farq qilganda va model mukammal bo'lmaganda, kalibrlash, teng yolg'on ijobiy…</a:t>
+              <a:t>Imkonsizlik teoremasi (Chouldechova, 2017; Kleinberg va boshq., 2016) shuni aytadiki, guruhlarda asosiy chastota farq qilganda va model mukammal bo'lmaganda, kalibrlash, teng yolg'on ijobiy va teng yolg'on salbiy darajalarini bir vaqtda ta'minlab bo'lmaydi.</a:t>
             </a:r>
           </a:p>
-        </p:txBody>
-      </p:sp>
-      <p:sp>
-        <p:nvSpPr>
-          <p:cNvPr id="22" name="Rounded Rectangle 21"/>
-          <p:cNvSpPr/>
-          <p:nvPr/>
-        </p:nvSpPr>
-        <p:spPr>
-          <a:xfrm>
-            <a:off x="550000" y="4342000"/>
-            <a:ext cx="11100000" cy="894000"/>
-          </a:xfrm>
-          <a:prstGeom prst="roundRect">
-            <a:avLst>
-              <a:gd name="adj" fmla="val 18000"/>
-            </a:avLst>
-          </a:prstGeom>
-          <a:solidFill>
-            <a:srgbClr val="F5F8FC"/>
-          </a:solidFill>
-          <a:ln>
-            <a:noFill/>
-          </a:ln>
-          <a:effectLst/>
-        </p:spPr>
-        <p:style>
-          <a:lnRef idx="1">
-            <a:schemeClr val="accent1"/>
-          </a:lnRef>
-          <a:fillRef idx="3">
-            <a:schemeClr val="accent1"/>
-          </a:fillRef>
-          <a:effectRef idx="2">
-            <a:schemeClr val="accent1"/>
-          </a:effectRef>
-          <a:fontRef idx="minor">
-            <a:schemeClr val="lt1"/>
-          </a:fontRef>
-        </p:style>
-        <p:txBody>
-          <a:bodyPr rtlCol="0" anchor="ctr"/>
-          <a:lstStyle/>
-          <a:p>
-            <a:pPr algn="ctr"/>
-          </a:p>
-        </p:txBody>
-      </p:sp>
-      <p:sp>
-        <p:nvSpPr>
-          <p:cNvPr id="23" name="Rectangle 22"/>
-          <p:cNvSpPr/>
-          <p:nvPr/>
-        </p:nvSpPr>
-        <p:spPr>
-          <a:xfrm>
-            <a:off x="550000" y="4342000"/>
-            <a:ext cx="70000" cy="894000"/>
-          </a:xfrm>
-          <a:prstGeom prst="rect">
-            <a:avLst/>
-          </a:prstGeom>
-          <a:solidFill>
-            <a:srgbClr val="B7791F"/>
-          </a:solidFill>
-          <a:ln>
-            <a:noFill/>
-          </a:ln>
-          <a:effectLst/>
-        </p:spPr>
-        <p:style>
-          <a:lnRef idx="1">
-            <a:schemeClr val="accent1"/>
-          </a:lnRef>
-          <a:fillRef idx="3">
-            <a:schemeClr val="accent1"/>
-          </a:fillRef>
-          <a:effectRef idx="2">
-            <a:schemeClr val="accent1"/>
-          </a:effectRef>
-          <a:fontRef idx="minor">
-            <a:schemeClr val="lt1"/>
-          </a:fontRef>
-        </p:style>
-        <p:txBody>
-          <a:bodyPr rtlCol="0" anchor="ctr"/>
-          <a:lstStyle/>
-          <a:p>
-            <a:pPr algn="ctr"/>
-          </a:p>
-        </p:txBody>
-      </p:sp>
-      <p:sp>
-        <p:nvSpPr>
-          <p:cNvPr id="24" name="Oval 23"/>
-          <p:cNvSpPr/>
-          <p:nvPr/>
-        </p:nvSpPr>
-        <p:spPr>
-          <a:xfrm>
-            <a:off x="800000" y="4559000"/>
-            <a:ext cx="460000" cy="460000"/>
-          </a:xfrm>
-          <a:prstGeom prst="ellipse">
-            <a:avLst/>
-          </a:prstGeom>
-          <a:solidFill>
-            <a:srgbClr val="B7791F"/>
-          </a:solidFill>
-          <a:ln>
-            <a:noFill/>
-          </a:ln>
-          <a:effectLst/>
-        </p:spPr>
-        <p:style>
-          <a:lnRef idx="1">
-            <a:schemeClr val="accent1"/>
-          </a:lnRef>
-          <a:fillRef idx="3">
-            <a:schemeClr val="accent1"/>
-          </a:fillRef>
-          <a:effectRef idx="2">
-            <a:schemeClr val="accent1"/>
-          </a:effectRef>
-          <a:fontRef idx="minor">
-            <a:schemeClr val="lt1"/>
-          </a:fontRef>
-        </p:style>
-        <p:txBody>
-          <a:bodyPr rtlCol="0" anchor="ctr" lIns="0" rIns="0"/>
-          <a:lstStyle/>
-          <a:p>
-            <a:pPr algn="ctr"/>
+          <a:p>
+            <a:pPr>
+              <a:spcBef>
+                <a:spcPts val="400"/>
+              </a:spcBef>
+            </a:pPr>
             <a:r>
-              <a:rPr sz="1600" b="1">
+              <a:rPr sz="1400">
                 <a:solidFill>
-                  <a:srgbClr val="FFFFFF"/>
+                  <a:srgbClr val="334055"/>
                 </a:solidFill>
                 <a:latin typeface="Calibri"/>
               </a:rPr>
-              <a:t>4</a:t>
-            </a:r>
-          </a:p>
-        </p:txBody>
-      </p:sp>
-      <p:sp>
-        <p:nvSpPr>
-          <p:cNvPr id="25" name="TextBox 24"/>
-          <p:cNvSpPr txBox="1"/>
-          <p:nvPr/>
-        </p:nvSpPr>
-        <p:spPr>
-          <a:xfrm>
-            <a:off x="1450000" y="4342000"/>
-            <a:ext cx="10050000" cy="894000"/>
-          </a:xfrm>
-          <a:prstGeom prst="rect">
-            <a:avLst/>
-          </a:prstGeom>
-          <a:noFill/>
-        </p:spPr>
-        <p:txBody>
-          <a:bodyPr wrap="square" anchor="ctr" lIns="50800" rIns="50800">
-            <a:spAutoFit/>
-          </a:bodyPr>
-          <a:lstStyle/>
-          <a:p>
-            <a:pPr algn="l"/>
-            <a:r>
-              <a:rPr sz="1400" b="0">
-                <a:solidFill>
-                  <a:srgbClr val="1B2430"/>
-                </a:solidFill>
-                <a:latin typeface="Calibri"/>
-              </a:rPr>
-              <a:t>Noxolislikni yumshatish usullari uch bosqichga bo'linadi.</a:t>
-            </a:r>
-          </a:p>
-        </p:txBody>
-      </p:sp>
-      <p:sp>
-        <p:nvSpPr>
-          <p:cNvPr id="26" name="Rounded Rectangle 25"/>
-          <p:cNvSpPr/>
-          <p:nvPr/>
-        </p:nvSpPr>
-        <p:spPr>
-          <a:xfrm>
-            <a:off x="550000" y="5356000"/>
-            <a:ext cx="11100000" cy="894000"/>
-          </a:xfrm>
-          <a:prstGeom prst="roundRect">
-            <a:avLst>
-              <a:gd name="adj" fmla="val 18000"/>
-            </a:avLst>
-          </a:prstGeom>
-          <a:solidFill>
-            <a:srgbClr val="F5F8FC"/>
-          </a:solidFill>
-          <a:ln>
-            <a:noFill/>
-          </a:ln>
-          <a:effectLst/>
-        </p:spPr>
-        <p:style>
-          <a:lnRef idx="1">
-            <a:schemeClr val="accent1"/>
-          </a:lnRef>
-          <a:fillRef idx="3">
-            <a:schemeClr val="accent1"/>
-          </a:fillRef>
-          <a:effectRef idx="2">
-            <a:schemeClr val="accent1"/>
-          </a:effectRef>
-          <a:fontRef idx="minor">
-            <a:schemeClr val="lt1"/>
-          </a:fontRef>
-        </p:style>
-        <p:txBody>
-          <a:bodyPr rtlCol="0" anchor="ctr"/>
-          <a:lstStyle/>
-          <a:p>
-            <a:pPr algn="ctr"/>
-          </a:p>
-        </p:txBody>
-      </p:sp>
-      <p:sp>
-        <p:nvSpPr>
-          <p:cNvPr id="27" name="Rectangle 26"/>
-          <p:cNvSpPr/>
-          <p:nvPr/>
-        </p:nvSpPr>
-        <p:spPr>
-          <a:xfrm>
-            <a:off x="550000" y="5356000"/>
-            <a:ext cx="70000" cy="894000"/>
-          </a:xfrm>
-          <a:prstGeom prst="rect">
-            <a:avLst/>
-          </a:prstGeom>
-          <a:solidFill>
-            <a:srgbClr val="C0392B"/>
-          </a:solidFill>
-          <a:ln>
-            <a:noFill/>
-          </a:ln>
-          <a:effectLst/>
-        </p:spPr>
-        <p:style>
-          <a:lnRef idx="1">
-            <a:schemeClr val="accent1"/>
-          </a:lnRef>
-          <a:fillRef idx="3">
-            <a:schemeClr val="accent1"/>
-          </a:fillRef>
-          <a:effectRef idx="2">
-            <a:schemeClr val="accent1"/>
-          </a:effectRef>
-          <a:fontRef idx="minor">
-            <a:schemeClr val="lt1"/>
-          </a:fontRef>
-        </p:style>
-        <p:txBody>
-          <a:bodyPr rtlCol="0" anchor="ctr"/>
-          <a:lstStyle/>
-          <a:p>
-            <a:pPr algn="ctr"/>
-          </a:p>
-        </p:txBody>
-      </p:sp>
-      <p:sp>
-        <p:nvSpPr>
-          <p:cNvPr id="28" name="Oval 27"/>
-          <p:cNvSpPr/>
-          <p:nvPr/>
-        </p:nvSpPr>
-        <p:spPr>
-          <a:xfrm>
-            <a:off x="800000" y="5573000"/>
-            <a:ext cx="460000" cy="460000"/>
-          </a:xfrm>
-          <a:prstGeom prst="ellipse">
-            <a:avLst/>
-          </a:prstGeom>
-          <a:solidFill>
-            <a:srgbClr val="C0392B"/>
-          </a:solidFill>
-          <a:ln>
-            <a:noFill/>
-          </a:ln>
-          <a:effectLst/>
-        </p:spPr>
-        <p:style>
-          <a:lnRef idx="1">
-            <a:schemeClr val="accent1"/>
-          </a:lnRef>
-          <a:fillRef idx="3">
-            <a:schemeClr val="accent1"/>
-          </a:fillRef>
-          <a:effectRef idx="2">
-            <a:schemeClr val="accent1"/>
-          </a:effectRef>
-          <a:fontRef idx="minor">
-            <a:schemeClr val="lt1"/>
-          </a:fontRef>
-        </p:style>
-        <p:txBody>
-          <a:bodyPr rtlCol="0" anchor="ctr" lIns="0" rIns="0"/>
-          <a:lstStyle/>
-          <a:p>
-            <a:pPr algn="ctr"/>
-            <a:r>
-              <a:rPr sz="1600" b="1">
-                <a:solidFill>
-                  <a:srgbClr val="FFFFFF"/>
-                </a:solidFill>
-                <a:latin typeface="Calibri"/>
-              </a:rPr>
-              <a:t>5</a:t>
-            </a:r>
-          </a:p>
-        </p:txBody>
-      </p:sp>
-      <p:sp>
-        <p:nvSpPr>
-          <p:cNvPr id="29" name="TextBox 28"/>
-          <p:cNvSpPr txBox="1"/>
-          <p:nvPr/>
-        </p:nvSpPr>
-        <p:spPr>
-          <a:xfrm>
-            <a:off x="1450000" y="5356000"/>
-            <a:ext cx="10050000" cy="894000"/>
-          </a:xfrm>
-          <a:prstGeom prst="rect">
-            <a:avLst/>
-          </a:prstGeom>
-          <a:noFill/>
-        </p:spPr>
-        <p:txBody>
-          <a:bodyPr wrap="square" anchor="ctr" lIns="50800" rIns="50800">
-            <a:spAutoFit/>
-          </a:bodyPr>
-          <a:lstStyle/>
-          <a:p>
-            <a:pPr algn="l"/>
-            <a:r>
-              <a:rPr sz="1400" b="0">
-                <a:solidFill>
-                  <a:srgbClr val="1B2430"/>
-                </a:solidFill>
-                <a:latin typeface="Calibri"/>
-              </a:rPr>
-              <a:t>Asosiy ochiq vositalar: Fairlearn (Microsoft tomonidan boshlangan, hozir mustaqil ochiq loyiha; metrikalar MetricFrame orqali, yumshatish algoritmlari, scikit-learn bilan mos) va AI…</a:t>
+              <a:t>Demak, metrika tanlovi — bu qiymat tanlovi, va u hujjatlashtirilishi, manfaatdor tomonlar bilan kelishilishi kerak.</a:t>
             </a:r>
           </a:p>
         </p:txBody>
@@ -24725,7 +26121,7 @@
               <p:cTn id="2" dur="indefinite" nodeType="mainSeq">
                 <p:childTnLst>
                   <p:par>
-                    <p:cTn id="127" fill="hold">
+                    <p:cTn id="79" fill="hold">
                       <p:stCondLst>
                         <p:cond delay="indefinite"/>
                         <p:cond evt="onBegin" delay="0">
@@ -25833,726 +27229,6 @@
                                         <p:cTn id="78" dur="550" fill="hold"/>
                                         <p:tgtEl>
                                           <p:spTgt spid="21"/>
-                                        </p:tgtEl>
-                                        <p:attrNameLst>
-                                          <p:attrName>ppt_y</p:attrName>
-                                        </p:attrNameLst>
-                                      </p:cBhvr>
-                                      <p:tavLst>
-                                        <p:tav tm="0">
-                                          <p:val>
-                                            <p:strVal val="#ppt_y+.08"/>
-                                          </p:val>
-                                        </p:tav>
-                                        <p:tav tm="100000">
-                                          <p:val>
-                                            <p:strVal val="#ppt_y"/>
-                                          </p:val>
-                                        </p:tav>
-                                      </p:tavLst>
-                                    </p:anim>
-                                  </p:childTnLst>
-                                </p:cTn>
-                              </p:par>
-                            </p:childTnLst>
-                          </p:cTn>
-                        </p:par>
-                        <p:par>
-                          <p:cTn id="79" fill="hold">
-                            <p:stCondLst>
-                              <p:cond delay="880"/>
-                            </p:stCondLst>
-                            <p:childTnLst>
-                              <p:par>
-                                <p:cTn id="80" presetID="42" presetClass="entr" presetSubtype="0" fill="hold" grpId="0" nodeType="afterEffect">
-                                  <p:stCondLst>
-                                    <p:cond delay="0"/>
-                                  </p:stCondLst>
-                                  <p:childTnLst>
-                                    <p:set>
-                                      <p:cBhvr>
-                                        <p:cTn id="81" dur="1" fill="hold">
-                                          <p:stCondLst>
-                                            <p:cond delay="0"/>
-                                          </p:stCondLst>
-                                        </p:cTn>
-                                        <p:tgtEl>
-                                          <p:spTgt spid="22"/>
-                                        </p:tgtEl>
-                                        <p:attrNameLst>
-                                          <p:attrName>style.visibility</p:attrName>
-                                        </p:attrNameLst>
-                                      </p:cBhvr>
-                                      <p:to>
-                                        <p:strVal val="visible"/>
-                                      </p:to>
-                                    </p:set>
-                                    <p:animEffect transition="in" filter="fade">
-                                      <p:cBhvr>
-                                        <p:cTn id="82" dur="550"/>
-                                        <p:tgtEl>
-                                          <p:spTgt spid="22"/>
-                                        </p:tgtEl>
-                                      </p:cBhvr>
-                                    </p:animEffect>
-                                    <p:anim calcmode="lin" valueType="num">
-                                      <p:cBhvr additive="base">
-                                        <p:cTn id="83" dur="550" fill="hold"/>
-                                        <p:tgtEl>
-                                          <p:spTgt spid="22"/>
-                                        </p:tgtEl>
-                                        <p:attrNameLst>
-                                          <p:attrName>ppt_x</p:attrName>
-                                        </p:attrNameLst>
-                                      </p:cBhvr>
-                                      <p:tavLst>
-                                        <p:tav tm="0">
-                                          <p:val>
-                                            <p:strVal val="#ppt_x"/>
-                                          </p:val>
-                                        </p:tav>
-                                        <p:tav tm="100000">
-                                          <p:val>
-                                            <p:strVal val="#ppt_x"/>
-                                          </p:val>
-                                        </p:tav>
-                                      </p:tavLst>
-                                    </p:anim>
-                                    <p:anim calcmode="lin" valueType="num">
-                                      <p:cBhvr additive="base">
-                                        <p:cTn id="84" dur="550" fill="hold"/>
-                                        <p:tgtEl>
-                                          <p:spTgt spid="22"/>
-                                        </p:tgtEl>
-                                        <p:attrNameLst>
-                                          <p:attrName>ppt_y</p:attrName>
-                                        </p:attrNameLst>
-                                      </p:cBhvr>
-                                      <p:tavLst>
-                                        <p:tav tm="0">
-                                          <p:val>
-                                            <p:strVal val="#ppt_y+.08"/>
-                                          </p:val>
-                                        </p:tav>
-                                        <p:tav tm="100000">
-                                          <p:val>
-                                            <p:strVal val="#ppt_y"/>
-                                          </p:val>
-                                        </p:tav>
-                                      </p:tavLst>
-                                    </p:anim>
-                                  </p:childTnLst>
-                                </p:cTn>
-                              </p:par>
-                            </p:childTnLst>
-                          </p:cTn>
-                        </p:par>
-                        <p:par>
-                          <p:cTn id="85" fill="hold">
-                            <p:stCondLst>
-                              <p:cond delay="880"/>
-                            </p:stCondLst>
-                            <p:childTnLst>
-                              <p:par>
-                                <p:cTn id="86" presetID="42" presetClass="entr" presetSubtype="0" fill="hold" grpId="0" nodeType="afterEffect">
-                                  <p:stCondLst>
-                                    <p:cond delay="0"/>
-                                  </p:stCondLst>
-                                  <p:childTnLst>
-                                    <p:set>
-                                      <p:cBhvr>
-                                        <p:cTn id="87" dur="1" fill="hold">
-                                          <p:stCondLst>
-                                            <p:cond delay="0"/>
-                                          </p:stCondLst>
-                                        </p:cTn>
-                                        <p:tgtEl>
-                                          <p:spTgt spid="23"/>
-                                        </p:tgtEl>
-                                        <p:attrNameLst>
-                                          <p:attrName>style.visibility</p:attrName>
-                                        </p:attrNameLst>
-                                      </p:cBhvr>
-                                      <p:to>
-                                        <p:strVal val="visible"/>
-                                      </p:to>
-                                    </p:set>
-                                    <p:animEffect transition="in" filter="fade">
-                                      <p:cBhvr>
-                                        <p:cTn id="88" dur="550"/>
-                                        <p:tgtEl>
-                                          <p:spTgt spid="23"/>
-                                        </p:tgtEl>
-                                      </p:cBhvr>
-                                    </p:animEffect>
-                                    <p:anim calcmode="lin" valueType="num">
-                                      <p:cBhvr additive="base">
-                                        <p:cTn id="89" dur="550" fill="hold"/>
-                                        <p:tgtEl>
-                                          <p:spTgt spid="23"/>
-                                        </p:tgtEl>
-                                        <p:attrNameLst>
-                                          <p:attrName>ppt_x</p:attrName>
-                                        </p:attrNameLst>
-                                      </p:cBhvr>
-                                      <p:tavLst>
-                                        <p:tav tm="0">
-                                          <p:val>
-                                            <p:strVal val="#ppt_x"/>
-                                          </p:val>
-                                        </p:tav>
-                                        <p:tav tm="100000">
-                                          <p:val>
-                                            <p:strVal val="#ppt_x"/>
-                                          </p:val>
-                                        </p:tav>
-                                      </p:tavLst>
-                                    </p:anim>
-                                    <p:anim calcmode="lin" valueType="num">
-                                      <p:cBhvr additive="base">
-                                        <p:cTn id="90" dur="550" fill="hold"/>
-                                        <p:tgtEl>
-                                          <p:spTgt spid="23"/>
-                                        </p:tgtEl>
-                                        <p:attrNameLst>
-                                          <p:attrName>ppt_y</p:attrName>
-                                        </p:attrNameLst>
-                                      </p:cBhvr>
-                                      <p:tavLst>
-                                        <p:tav tm="0">
-                                          <p:val>
-                                            <p:strVal val="#ppt_y+.08"/>
-                                          </p:val>
-                                        </p:tav>
-                                        <p:tav tm="100000">
-                                          <p:val>
-                                            <p:strVal val="#ppt_y"/>
-                                          </p:val>
-                                        </p:tav>
-                                      </p:tavLst>
-                                    </p:anim>
-                                  </p:childTnLst>
-                                </p:cTn>
-                              </p:par>
-                            </p:childTnLst>
-                          </p:cTn>
-                        </p:par>
-                        <p:par>
-                          <p:cTn id="91" fill="hold">
-                            <p:stCondLst>
-                              <p:cond delay="880"/>
-                            </p:stCondLst>
-                            <p:childTnLst>
-                              <p:par>
-                                <p:cTn id="92" presetID="53" presetClass="entr" presetSubtype="16" fill="hold" grpId="0" nodeType="afterEffect">
-                                  <p:stCondLst>
-                                    <p:cond delay="0"/>
-                                  </p:stCondLst>
-                                  <p:childTnLst>
-                                    <p:set>
-                                      <p:cBhvr>
-                                        <p:cTn id="93" dur="1" fill="hold">
-                                          <p:stCondLst>
-                                            <p:cond delay="0"/>
-                                          </p:stCondLst>
-                                        </p:cTn>
-                                        <p:tgtEl>
-                                          <p:spTgt spid="24"/>
-                                        </p:tgtEl>
-                                        <p:attrNameLst>
-                                          <p:attrName>style.visibility</p:attrName>
-                                        </p:attrNameLst>
-                                      </p:cBhvr>
-                                      <p:to>
-                                        <p:strVal val="visible"/>
-                                      </p:to>
-                                    </p:set>
-                                    <p:animEffect transition="in" filter="fade">
-                                      <p:cBhvr>
-                                        <p:cTn id="94" dur="550"/>
-                                        <p:tgtEl>
-                                          <p:spTgt spid="24"/>
-                                        </p:tgtEl>
-                                      </p:cBhvr>
-                                    </p:animEffect>
-                                    <p:anim calcmode="lin" valueType="num">
-                                      <p:cBhvr additive="base">
-                                        <p:cTn id="95" dur="550" fill="hold"/>
-                                        <p:tgtEl>
-                                          <p:spTgt spid="24"/>
-                                        </p:tgtEl>
-                                        <p:attrNameLst>
-                                          <p:attrName>ppt_w</p:attrName>
-                                        </p:attrNameLst>
-                                      </p:cBhvr>
-                                      <p:tavLst>
-                                        <p:tav tm="0">
-                                          <p:val>
-                                            <p:strVal val="0"/>
-                                          </p:val>
-                                        </p:tav>
-                                        <p:tav tm="100000">
-                                          <p:val>
-                                            <p:strVal val="#ppt_w"/>
-                                          </p:val>
-                                        </p:tav>
-                                      </p:tavLst>
-                                    </p:anim>
-                                    <p:anim calcmode="lin" valueType="num">
-                                      <p:cBhvr additive="base">
-                                        <p:cTn id="96" dur="550" fill="hold"/>
-                                        <p:tgtEl>
-                                          <p:spTgt spid="24"/>
-                                        </p:tgtEl>
-                                        <p:attrNameLst>
-                                          <p:attrName>ppt_h</p:attrName>
-                                        </p:attrNameLst>
-                                      </p:cBhvr>
-                                      <p:tavLst>
-                                        <p:tav tm="0">
-                                          <p:val>
-                                            <p:strVal val="0"/>
-                                          </p:val>
-                                        </p:tav>
-                                        <p:tav tm="100000">
-                                          <p:val>
-                                            <p:strVal val="#ppt_h"/>
-                                          </p:val>
-                                        </p:tav>
-                                      </p:tavLst>
-                                    </p:anim>
-                                  </p:childTnLst>
-                                </p:cTn>
-                              </p:par>
-                            </p:childTnLst>
-                          </p:cTn>
-                        </p:par>
-                        <p:par>
-                          <p:cTn id="97" fill="hold">
-                            <p:stCondLst>
-                              <p:cond delay="880"/>
-                            </p:stCondLst>
-                            <p:childTnLst>
-                              <p:par>
-                                <p:cTn id="98" presetID="42" presetClass="entr" presetSubtype="0" fill="hold" grpId="0" nodeType="afterEffect">
-                                  <p:stCondLst>
-                                    <p:cond delay="0"/>
-                                  </p:stCondLst>
-                                  <p:childTnLst>
-                                    <p:set>
-                                      <p:cBhvr>
-                                        <p:cTn id="99" dur="1" fill="hold">
-                                          <p:stCondLst>
-                                            <p:cond delay="0"/>
-                                          </p:stCondLst>
-                                        </p:cTn>
-                                        <p:tgtEl>
-                                          <p:spTgt spid="25"/>
-                                        </p:tgtEl>
-                                        <p:attrNameLst>
-                                          <p:attrName>style.visibility</p:attrName>
-                                        </p:attrNameLst>
-                                      </p:cBhvr>
-                                      <p:to>
-                                        <p:strVal val="visible"/>
-                                      </p:to>
-                                    </p:set>
-                                    <p:animEffect transition="in" filter="fade">
-                                      <p:cBhvr>
-                                        <p:cTn id="100" dur="550"/>
-                                        <p:tgtEl>
-                                          <p:spTgt spid="25"/>
-                                        </p:tgtEl>
-                                      </p:cBhvr>
-                                    </p:animEffect>
-                                    <p:anim calcmode="lin" valueType="num">
-                                      <p:cBhvr additive="base">
-                                        <p:cTn id="101" dur="550" fill="hold"/>
-                                        <p:tgtEl>
-                                          <p:spTgt spid="25"/>
-                                        </p:tgtEl>
-                                        <p:attrNameLst>
-                                          <p:attrName>ppt_x</p:attrName>
-                                        </p:attrNameLst>
-                                      </p:cBhvr>
-                                      <p:tavLst>
-                                        <p:tav tm="0">
-                                          <p:val>
-                                            <p:strVal val="#ppt_x"/>
-                                          </p:val>
-                                        </p:tav>
-                                        <p:tav tm="100000">
-                                          <p:val>
-                                            <p:strVal val="#ppt_x"/>
-                                          </p:val>
-                                        </p:tav>
-                                      </p:tavLst>
-                                    </p:anim>
-                                    <p:anim calcmode="lin" valueType="num">
-                                      <p:cBhvr additive="base">
-                                        <p:cTn id="102" dur="550" fill="hold"/>
-                                        <p:tgtEl>
-                                          <p:spTgt spid="25"/>
-                                        </p:tgtEl>
-                                        <p:attrNameLst>
-                                          <p:attrName>ppt_y</p:attrName>
-                                        </p:attrNameLst>
-                                      </p:cBhvr>
-                                      <p:tavLst>
-                                        <p:tav tm="0">
-                                          <p:val>
-                                            <p:strVal val="#ppt_y+.08"/>
-                                          </p:val>
-                                        </p:tav>
-                                        <p:tav tm="100000">
-                                          <p:val>
-                                            <p:strVal val="#ppt_y"/>
-                                          </p:val>
-                                        </p:tav>
-                                      </p:tavLst>
-                                    </p:anim>
-                                  </p:childTnLst>
-                                </p:cTn>
-                              </p:par>
-                            </p:childTnLst>
-                          </p:cTn>
-                        </p:par>
-                        <p:par>
-                          <p:cTn id="103" fill="hold">
-                            <p:stCondLst>
-                              <p:cond delay="1100"/>
-                            </p:stCondLst>
-                            <p:childTnLst>
-                              <p:par>
-                                <p:cTn id="104" presetID="42" presetClass="entr" presetSubtype="0" fill="hold" grpId="0" nodeType="afterEffect">
-                                  <p:stCondLst>
-                                    <p:cond delay="0"/>
-                                  </p:stCondLst>
-                                  <p:childTnLst>
-                                    <p:set>
-                                      <p:cBhvr>
-                                        <p:cTn id="105" dur="1" fill="hold">
-                                          <p:stCondLst>
-                                            <p:cond delay="0"/>
-                                          </p:stCondLst>
-                                        </p:cTn>
-                                        <p:tgtEl>
-                                          <p:spTgt spid="26"/>
-                                        </p:tgtEl>
-                                        <p:attrNameLst>
-                                          <p:attrName>style.visibility</p:attrName>
-                                        </p:attrNameLst>
-                                      </p:cBhvr>
-                                      <p:to>
-                                        <p:strVal val="visible"/>
-                                      </p:to>
-                                    </p:set>
-                                    <p:animEffect transition="in" filter="fade">
-                                      <p:cBhvr>
-                                        <p:cTn id="106" dur="550"/>
-                                        <p:tgtEl>
-                                          <p:spTgt spid="26"/>
-                                        </p:tgtEl>
-                                      </p:cBhvr>
-                                    </p:animEffect>
-                                    <p:anim calcmode="lin" valueType="num">
-                                      <p:cBhvr additive="base">
-                                        <p:cTn id="107" dur="550" fill="hold"/>
-                                        <p:tgtEl>
-                                          <p:spTgt spid="26"/>
-                                        </p:tgtEl>
-                                        <p:attrNameLst>
-                                          <p:attrName>ppt_x</p:attrName>
-                                        </p:attrNameLst>
-                                      </p:cBhvr>
-                                      <p:tavLst>
-                                        <p:tav tm="0">
-                                          <p:val>
-                                            <p:strVal val="#ppt_x"/>
-                                          </p:val>
-                                        </p:tav>
-                                        <p:tav tm="100000">
-                                          <p:val>
-                                            <p:strVal val="#ppt_x"/>
-                                          </p:val>
-                                        </p:tav>
-                                      </p:tavLst>
-                                    </p:anim>
-                                    <p:anim calcmode="lin" valueType="num">
-                                      <p:cBhvr additive="base">
-                                        <p:cTn id="108" dur="550" fill="hold"/>
-                                        <p:tgtEl>
-                                          <p:spTgt spid="26"/>
-                                        </p:tgtEl>
-                                        <p:attrNameLst>
-                                          <p:attrName>ppt_y</p:attrName>
-                                        </p:attrNameLst>
-                                      </p:cBhvr>
-                                      <p:tavLst>
-                                        <p:tav tm="0">
-                                          <p:val>
-                                            <p:strVal val="#ppt_y+.08"/>
-                                          </p:val>
-                                        </p:tav>
-                                        <p:tav tm="100000">
-                                          <p:val>
-                                            <p:strVal val="#ppt_y"/>
-                                          </p:val>
-                                        </p:tav>
-                                      </p:tavLst>
-                                    </p:anim>
-                                  </p:childTnLst>
-                                </p:cTn>
-                              </p:par>
-                            </p:childTnLst>
-                          </p:cTn>
-                        </p:par>
-                        <p:par>
-                          <p:cTn id="109" fill="hold">
-                            <p:stCondLst>
-                              <p:cond delay="1100"/>
-                            </p:stCondLst>
-                            <p:childTnLst>
-                              <p:par>
-                                <p:cTn id="110" presetID="42" presetClass="entr" presetSubtype="0" fill="hold" grpId="0" nodeType="afterEffect">
-                                  <p:stCondLst>
-                                    <p:cond delay="0"/>
-                                  </p:stCondLst>
-                                  <p:childTnLst>
-                                    <p:set>
-                                      <p:cBhvr>
-                                        <p:cTn id="111" dur="1" fill="hold">
-                                          <p:stCondLst>
-                                            <p:cond delay="0"/>
-                                          </p:stCondLst>
-                                        </p:cTn>
-                                        <p:tgtEl>
-                                          <p:spTgt spid="27"/>
-                                        </p:tgtEl>
-                                        <p:attrNameLst>
-                                          <p:attrName>style.visibility</p:attrName>
-                                        </p:attrNameLst>
-                                      </p:cBhvr>
-                                      <p:to>
-                                        <p:strVal val="visible"/>
-                                      </p:to>
-                                    </p:set>
-                                    <p:animEffect transition="in" filter="fade">
-                                      <p:cBhvr>
-                                        <p:cTn id="112" dur="550"/>
-                                        <p:tgtEl>
-                                          <p:spTgt spid="27"/>
-                                        </p:tgtEl>
-                                      </p:cBhvr>
-                                    </p:animEffect>
-                                    <p:anim calcmode="lin" valueType="num">
-                                      <p:cBhvr additive="base">
-                                        <p:cTn id="113" dur="550" fill="hold"/>
-                                        <p:tgtEl>
-                                          <p:spTgt spid="27"/>
-                                        </p:tgtEl>
-                                        <p:attrNameLst>
-                                          <p:attrName>ppt_x</p:attrName>
-                                        </p:attrNameLst>
-                                      </p:cBhvr>
-                                      <p:tavLst>
-                                        <p:tav tm="0">
-                                          <p:val>
-                                            <p:strVal val="#ppt_x"/>
-                                          </p:val>
-                                        </p:tav>
-                                        <p:tav tm="100000">
-                                          <p:val>
-                                            <p:strVal val="#ppt_x"/>
-                                          </p:val>
-                                        </p:tav>
-                                      </p:tavLst>
-                                    </p:anim>
-                                    <p:anim calcmode="lin" valueType="num">
-                                      <p:cBhvr additive="base">
-                                        <p:cTn id="114" dur="550" fill="hold"/>
-                                        <p:tgtEl>
-                                          <p:spTgt spid="27"/>
-                                        </p:tgtEl>
-                                        <p:attrNameLst>
-                                          <p:attrName>ppt_y</p:attrName>
-                                        </p:attrNameLst>
-                                      </p:cBhvr>
-                                      <p:tavLst>
-                                        <p:tav tm="0">
-                                          <p:val>
-                                            <p:strVal val="#ppt_y+.08"/>
-                                          </p:val>
-                                        </p:tav>
-                                        <p:tav tm="100000">
-                                          <p:val>
-                                            <p:strVal val="#ppt_y"/>
-                                          </p:val>
-                                        </p:tav>
-                                      </p:tavLst>
-                                    </p:anim>
-                                  </p:childTnLst>
-                                </p:cTn>
-                              </p:par>
-                            </p:childTnLst>
-                          </p:cTn>
-                        </p:par>
-                        <p:par>
-                          <p:cTn id="115" fill="hold">
-                            <p:stCondLst>
-                              <p:cond delay="1100"/>
-                            </p:stCondLst>
-                            <p:childTnLst>
-                              <p:par>
-                                <p:cTn id="116" presetID="53" presetClass="entr" presetSubtype="16" fill="hold" grpId="0" nodeType="afterEffect">
-                                  <p:stCondLst>
-                                    <p:cond delay="0"/>
-                                  </p:stCondLst>
-                                  <p:childTnLst>
-                                    <p:set>
-                                      <p:cBhvr>
-                                        <p:cTn id="117" dur="1" fill="hold">
-                                          <p:stCondLst>
-                                            <p:cond delay="0"/>
-                                          </p:stCondLst>
-                                        </p:cTn>
-                                        <p:tgtEl>
-                                          <p:spTgt spid="28"/>
-                                        </p:tgtEl>
-                                        <p:attrNameLst>
-                                          <p:attrName>style.visibility</p:attrName>
-                                        </p:attrNameLst>
-                                      </p:cBhvr>
-                                      <p:to>
-                                        <p:strVal val="visible"/>
-                                      </p:to>
-                                    </p:set>
-                                    <p:animEffect transition="in" filter="fade">
-                                      <p:cBhvr>
-                                        <p:cTn id="118" dur="550"/>
-                                        <p:tgtEl>
-                                          <p:spTgt spid="28"/>
-                                        </p:tgtEl>
-                                      </p:cBhvr>
-                                    </p:animEffect>
-                                    <p:anim calcmode="lin" valueType="num">
-                                      <p:cBhvr additive="base">
-                                        <p:cTn id="119" dur="550" fill="hold"/>
-                                        <p:tgtEl>
-                                          <p:spTgt spid="28"/>
-                                        </p:tgtEl>
-                                        <p:attrNameLst>
-                                          <p:attrName>ppt_w</p:attrName>
-                                        </p:attrNameLst>
-                                      </p:cBhvr>
-                                      <p:tavLst>
-                                        <p:tav tm="0">
-                                          <p:val>
-                                            <p:strVal val="0"/>
-                                          </p:val>
-                                        </p:tav>
-                                        <p:tav tm="100000">
-                                          <p:val>
-                                            <p:strVal val="#ppt_w"/>
-                                          </p:val>
-                                        </p:tav>
-                                      </p:tavLst>
-                                    </p:anim>
-                                    <p:anim calcmode="lin" valueType="num">
-                                      <p:cBhvr additive="base">
-                                        <p:cTn id="120" dur="550" fill="hold"/>
-                                        <p:tgtEl>
-                                          <p:spTgt spid="28"/>
-                                        </p:tgtEl>
-                                        <p:attrNameLst>
-                                          <p:attrName>ppt_h</p:attrName>
-                                        </p:attrNameLst>
-                                      </p:cBhvr>
-                                      <p:tavLst>
-                                        <p:tav tm="0">
-                                          <p:val>
-                                            <p:strVal val="0"/>
-                                          </p:val>
-                                        </p:tav>
-                                        <p:tav tm="100000">
-                                          <p:val>
-                                            <p:strVal val="#ppt_h"/>
-                                          </p:val>
-                                        </p:tav>
-                                      </p:tavLst>
-                                    </p:anim>
-                                  </p:childTnLst>
-                                </p:cTn>
-                              </p:par>
-                            </p:childTnLst>
-                          </p:cTn>
-                        </p:par>
-                        <p:par>
-                          <p:cTn id="121" fill="hold">
-                            <p:stCondLst>
-                              <p:cond delay="1100"/>
-                            </p:stCondLst>
-                            <p:childTnLst>
-                              <p:par>
-                                <p:cTn id="122" presetID="42" presetClass="entr" presetSubtype="0" fill="hold" grpId="0" nodeType="afterEffect">
-                                  <p:stCondLst>
-                                    <p:cond delay="0"/>
-                                  </p:stCondLst>
-                                  <p:childTnLst>
-                                    <p:set>
-                                      <p:cBhvr>
-                                        <p:cTn id="123" dur="1" fill="hold">
-                                          <p:stCondLst>
-                                            <p:cond delay="0"/>
-                                          </p:stCondLst>
-                                        </p:cTn>
-                                        <p:tgtEl>
-                                          <p:spTgt spid="29"/>
-                                        </p:tgtEl>
-                                        <p:attrNameLst>
-                                          <p:attrName>style.visibility</p:attrName>
-                                        </p:attrNameLst>
-                                      </p:cBhvr>
-                                      <p:to>
-                                        <p:strVal val="visible"/>
-                                      </p:to>
-                                    </p:set>
-                                    <p:animEffect transition="in" filter="fade">
-                                      <p:cBhvr>
-                                        <p:cTn id="124" dur="550"/>
-                                        <p:tgtEl>
-                                          <p:spTgt spid="29"/>
-                                        </p:tgtEl>
-                                      </p:cBhvr>
-                                    </p:animEffect>
-                                    <p:anim calcmode="lin" valueType="num">
-                                      <p:cBhvr additive="base">
-                                        <p:cTn id="125" dur="550" fill="hold"/>
-                                        <p:tgtEl>
-                                          <p:spTgt spid="29"/>
-                                        </p:tgtEl>
-                                        <p:attrNameLst>
-                                          <p:attrName>ppt_x</p:attrName>
-                                        </p:attrNameLst>
-                                      </p:cBhvr>
-                                      <p:tavLst>
-                                        <p:tav tm="0">
-                                          <p:val>
-                                            <p:strVal val="#ppt_x"/>
-                                          </p:val>
-                                        </p:tav>
-                                        <p:tav tm="100000">
-                                          <p:val>
-                                            <p:strVal val="#ppt_x"/>
-                                          </p:val>
-                                        </p:tav>
-                                      </p:tavLst>
-                                    </p:anim>
-                                    <p:anim calcmode="lin" valueType="num">
-                                      <p:cBhvr additive="base">
-                                        <p:cTn id="126" dur="550" fill="hold"/>
-                                        <p:tgtEl>
-                                          <p:spTgt spid="29"/>
                                         </p:tgtEl>
                                         <p:attrNameLst>
                                           <p:attrName>ppt_y</p:attrName>
@@ -26615,14 +27291,6 @@
       <p:bldP spid="19" grpId="0" animBg="1"/>
       <p:bldP spid="20" grpId="0" animBg="1"/>
       <p:bldP spid="21" grpId="0" animBg="1"/>
-      <p:bldP spid="22" grpId="0" animBg="1"/>
-      <p:bldP spid="23" grpId="0" animBg="1"/>
-      <p:bldP spid="24" grpId="0" animBg="1"/>
-      <p:bldP spid="25" grpId="0" animBg="1"/>
-      <p:bldP spid="26" grpId="0" animBg="1"/>
-      <p:bldP spid="27" grpId="0" animBg="1"/>
-      <p:bldP spid="28" grpId="0" animBg="1"/>
-      <p:bldP spid="29" grpId="0" animBg="1"/>
     </p:bldLst>
   </p:timing>
 </p:sld>
